--- a/posters.pptx
+++ b/posters.pptx
@@ -7,13 +7,15 @@
   <p:sldIdLst>
     <p:sldId id="257" r:id="rId2"/>
     <p:sldId id="259" r:id="rId3"/>
-    <p:sldId id="261" r:id="rId4"/>
+    <p:sldId id="267" r:id="rId4"/>
     <p:sldId id="263" r:id="rId5"/>
     <p:sldId id="264" r:id="rId6"/>
-    <p:sldId id="265" r:id="rId7"/>
-    <p:sldId id="262" r:id="rId8"/>
-    <p:sldId id="260" r:id="rId9"/>
-    <p:sldId id="258" r:id="rId10"/>
+    <p:sldId id="266" r:id="rId7"/>
+    <p:sldId id="265" r:id="rId8"/>
+    <p:sldId id="262" r:id="rId9"/>
+    <p:sldId id="268" r:id="rId10"/>
+    <p:sldId id="260" r:id="rId11"/>
+    <p:sldId id="258" r:id="rId12"/>
   </p:sldIdLst>
   <p:sldSz cx="6858000" cy="12192000"/>
   <p:notesSz cx="6858000" cy="9144000"/>
@@ -251,7 +253,7 @@
           <a:p>
             <a:fld id="{C5780ADC-C495-4E7E-87E7-0599689638EE}" type="datetimeFigureOut">
               <a:rPr lang="en-IN" smtClean="0"/>
-              <a:t>06-06-2024</a:t>
+              <a:t>19-10-2024</a:t>
             </a:fld>
             <a:endParaRPr lang="en-IN"/>
           </a:p>
@@ -421,7 +423,7 @@
           <a:p>
             <a:fld id="{C5780ADC-C495-4E7E-87E7-0599689638EE}" type="datetimeFigureOut">
               <a:rPr lang="en-IN" smtClean="0"/>
-              <a:t>06-06-2024</a:t>
+              <a:t>19-10-2024</a:t>
             </a:fld>
             <a:endParaRPr lang="en-IN"/>
           </a:p>
@@ -601,7 +603,7 @@
           <a:p>
             <a:fld id="{C5780ADC-C495-4E7E-87E7-0599689638EE}" type="datetimeFigureOut">
               <a:rPr lang="en-IN" smtClean="0"/>
-              <a:t>06-06-2024</a:t>
+              <a:t>19-10-2024</a:t>
             </a:fld>
             <a:endParaRPr lang="en-IN"/>
           </a:p>
@@ -771,7 +773,7 @@
           <a:p>
             <a:fld id="{C5780ADC-C495-4E7E-87E7-0599689638EE}" type="datetimeFigureOut">
               <a:rPr lang="en-IN" smtClean="0"/>
-              <a:t>06-06-2024</a:t>
+              <a:t>19-10-2024</a:t>
             </a:fld>
             <a:endParaRPr lang="en-IN"/>
           </a:p>
@@ -1015,7 +1017,7 @@
           <a:p>
             <a:fld id="{C5780ADC-C495-4E7E-87E7-0599689638EE}" type="datetimeFigureOut">
               <a:rPr lang="en-IN" smtClean="0"/>
-              <a:t>06-06-2024</a:t>
+              <a:t>19-10-2024</a:t>
             </a:fld>
             <a:endParaRPr lang="en-IN"/>
           </a:p>
@@ -1247,7 +1249,7 @@
           <a:p>
             <a:fld id="{C5780ADC-C495-4E7E-87E7-0599689638EE}" type="datetimeFigureOut">
               <a:rPr lang="en-IN" smtClean="0"/>
-              <a:t>06-06-2024</a:t>
+              <a:t>19-10-2024</a:t>
             </a:fld>
             <a:endParaRPr lang="en-IN"/>
           </a:p>
@@ -1614,7 +1616,7 @@
           <a:p>
             <a:fld id="{C5780ADC-C495-4E7E-87E7-0599689638EE}" type="datetimeFigureOut">
               <a:rPr lang="en-IN" smtClean="0"/>
-              <a:t>06-06-2024</a:t>
+              <a:t>19-10-2024</a:t>
             </a:fld>
             <a:endParaRPr lang="en-IN"/>
           </a:p>
@@ -1732,7 +1734,7 @@
           <a:p>
             <a:fld id="{C5780ADC-C495-4E7E-87E7-0599689638EE}" type="datetimeFigureOut">
               <a:rPr lang="en-IN" smtClean="0"/>
-              <a:t>06-06-2024</a:t>
+              <a:t>19-10-2024</a:t>
             </a:fld>
             <a:endParaRPr lang="en-IN"/>
           </a:p>
@@ -1827,7 +1829,7 @@
           <a:p>
             <a:fld id="{C5780ADC-C495-4E7E-87E7-0599689638EE}" type="datetimeFigureOut">
               <a:rPr lang="en-IN" smtClean="0"/>
-              <a:t>06-06-2024</a:t>
+              <a:t>19-10-2024</a:t>
             </a:fld>
             <a:endParaRPr lang="en-IN"/>
           </a:p>
@@ -2104,7 +2106,7 @@
           <a:p>
             <a:fld id="{C5780ADC-C495-4E7E-87E7-0599689638EE}" type="datetimeFigureOut">
               <a:rPr lang="en-IN" smtClean="0"/>
-              <a:t>06-06-2024</a:t>
+              <a:t>19-10-2024</a:t>
             </a:fld>
             <a:endParaRPr lang="en-IN"/>
           </a:p>
@@ -2361,7 +2363,7 @@
           <a:p>
             <a:fld id="{C5780ADC-C495-4E7E-87E7-0599689638EE}" type="datetimeFigureOut">
               <a:rPr lang="en-IN" smtClean="0"/>
-              <a:t>06-06-2024</a:t>
+              <a:t>19-10-2024</a:t>
             </a:fld>
             <a:endParaRPr lang="en-IN"/>
           </a:p>
@@ -2574,7 +2576,7 @@
           <a:p>
             <a:fld id="{C5780ADC-C495-4E7E-87E7-0599689638EE}" type="datetimeFigureOut">
               <a:rPr lang="en-IN" smtClean="0"/>
-              <a:t>06-06-2024</a:t>
+              <a:t>19-10-2024</a:t>
             </a:fld>
             <a:endParaRPr lang="en-IN"/>
           </a:p>
@@ -3138,6 +3140,137 @@
 </p:sld>
 </file>
 
+<file path=ppt/slides/slide10.xml><?xml version="1.0" encoding="utf-8"?>
+<p:sld xmlns:a="http://schemas.openxmlformats.org/drawingml/2006/main" xmlns:r="http://schemas.openxmlformats.org/officeDocument/2006/relationships" xmlns:p="http://schemas.openxmlformats.org/presentationml/2006/main">
+  <p:cSld>
+    <p:spTree>
+      <p:nvGrpSpPr>
+        <p:cNvPr id="1" name=""/>
+        <p:cNvGrpSpPr/>
+        <p:nvPr/>
+      </p:nvGrpSpPr>
+      <p:grpSpPr>
+        <a:xfrm>
+          <a:off x="0" y="0"/>
+          <a:ext cx="0" cy="0"/>
+          <a:chOff x="0" y="0"/>
+          <a:chExt cx="0" cy="0"/>
+        </a:xfrm>
+      </p:grpSpPr>
+      <p:pic>
+        <p:nvPicPr>
+          <p:cNvPr id="3" name="Picture 2">
+            <a:extLst>
+              <a:ext uri="{FF2B5EF4-FFF2-40B4-BE49-F238E27FC236}">
+                <a16:creationId xmlns:a16="http://schemas.microsoft.com/office/drawing/2014/main" id="{FD120E9F-02FD-16FB-1F19-8A799143747A}"/>
+              </a:ext>
+            </a:extLst>
+          </p:cNvPr>
+          <p:cNvPicPr>
+            <a:picLocks noChangeAspect="1"/>
+          </p:cNvPicPr>
+          <p:nvPr/>
+        </p:nvPicPr>
+        <p:blipFill>
+          <a:blip r:embed="rId2">
+            <a:extLst>
+              <a:ext uri="{28A0092B-C50C-407E-A947-70E740481C1C}">
+                <a14:useLocalDpi xmlns:a14="http://schemas.microsoft.com/office/drawing/2010/main" val="0"/>
+              </a:ext>
+            </a:extLst>
+          </a:blip>
+          <a:stretch>
+            <a:fillRect/>
+          </a:stretch>
+        </p:blipFill>
+        <p:spPr>
+          <a:xfrm>
+            <a:off x="462915" y="4427577"/>
+            <a:ext cx="4389120" cy="2468880"/>
+          </a:xfrm>
+          <a:prstGeom prst="rect">
+            <a:avLst/>
+          </a:prstGeom>
+        </p:spPr>
+      </p:pic>
+    </p:spTree>
+    <p:extLst>
+      <p:ext uri="{BB962C8B-B14F-4D97-AF65-F5344CB8AC3E}">
+        <p14:creationId xmlns:p14="http://schemas.microsoft.com/office/powerpoint/2010/main" val="847829575"/>
+      </p:ext>
+    </p:extLst>
+  </p:cSld>
+  <p:clrMapOvr>
+    <a:masterClrMapping/>
+  </p:clrMapOvr>
+</p:sld>
+</file>
+
+<file path=ppt/slides/slide11.xml><?xml version="1.0" encoding="utf-8"?>
+<p:sld xmlns:a="http://schemas.openxmlformats.org/drawingml/2006/main" xmlns:r="http://schemas.openxmlformats.org/officeDocument/2006/relationships" xmlns:p="http://schemas.openxmlformats.org/presentationml/2006/main">
+  <p:cSld>
+    <p:spTree>
+      <p:nvGrpSpPr>
+        <p:cNvPr id="1" name=""/>
+        <p:cNvGrpSpPr/>
+        <p:nvPr/>
+      </p:nvGrpSpPr>
+      <p:grpSpPr>
+        <a:xfrm>
+          <a:off x="0" y="0"/>
+          <a:ext cx="0" cy="0"/>
+          <a:chOff x="0" y="0"/>
+          <a:chExt cx="0" cy="0"/>
+        </a:xfrm>
+      </p:grpSpPr>
+      <p:pic>
+        <p:nvPicPr>
+          <p:cNvPr id="7" name="Picture 6">
+            <a:extLst>
+              <a:ext uri="{FF2B5EF4-FFF2-40B4-BE49-F238E27FC236}">
+                <a16:creationId xmlns:a16="http://schemas.microsoft.com/office/drawing/2014/main" id="{76CA6161-E05D-14EC-747C-79319681E604}"/>
+              </a:ext>
+            </a:extLst>
+          </p:cNvPr>
+          <p:cNvPicPr>
+            <a:picLocks/>
+          </p:cNvPicPr>
+          <p:nvPr/>
+        </p:nvPicPr>
+        <p:blipFill rotWithShape="1">
+          <a:blip r:embed="rId2">
+            <a:extLst>
+              <a:ext uri="{28A0092B-C50C-407E-A947-70E740481C1C}">
+                <a14:useLocalDpi xmlns:a14="http://schemas.microsoft.com/office/drawing/2010/main" val="0"/>
+              </a:ext>
+            </a:extLst>
+          </a:blip>
+          <a:srcRect l="23001" t="5779" r="25999" b="3111"/>
+          <a:stretch/>
+        </p:blipFill>
+        <p:spPr>
+          <a:xfrm>
+            <a:off x="1577340" y="4390073"/>
+            <a:ext cx="3442500" cy="3442500"/>
+          </a:xfrm>
+          <a:prstGeom prst="rect">
+            <a:avLst/>
+          </a:prstGeom>
+        </p:spPr>
+      </p:pic>
+    </p:spTree>
+    <p:extLst>
+      <p:ext uri="{BB962C8B-B14F-4D97-AF65-F5344CB8AC3E}">
+        <p14:creationId xmlns:p14="http://schemas.microsoft.com/office/powerpoint/2010/main" val="3956892257"/>
+      </p:ext>
+    </p:extLst>
+  </p:cSld>
+  <p:clrMapOvr>
+    <a:masterClrMapping/>
+  </p:clrMapOvr>
+</p:sld>
+</file>
+
 <file path=ppt/slides/slide2.xml><?xml version="1.0" encoding="utf-8"?>
 <p:sld xmlns:a="http://schemas.openxmlformats.org/drawingml/2006/main" xmlns:r="http://schemas.openxmlformats.org/officeDocument/2006/relationships" xmlns:p="http://schemas.openxmlformats.org/presentationml/2006/main">
   <p:cSld>
@@ -3297,6 +3430,35 @@
           <a:chExt cx="0" cy="0"/>
         </a:xfrm>
       </p:grpSpPr>
+      <p:pic>
+        <p:nvPicPr>
+          <p:cNvPr id="49" name="Picture 48">
+            <a:extLst>
+              <a:ext uri="{FF2B5EF4-FFF2-40B4-BE49-F238E27FC236}">
+                <a16:creationId xmlns:a16="http://schemas.microsoft.com/office/drawing/2014/main" id="{8948DAB6-3E0B-EB53-C128-87EFAC2F2CC8}"/>
+              </a:ext>
+            </a:extLst>
+          </p:cNvPr>
+          <p:cNvPicPr>
+            <a:picLocks noChangeAspect="1"/>
+          </p:cNvPicPr>
+          <p:nvPr/>
+        </p:nvPicPr>
+        <p:blipFill rotWithShape="1">
+          <a:blip r:embed="rId2"/>
+          <a:srcRect l="20212"/>
+          <a:stretch/>
+        </p:blipFill>
+        <p:spPr>
+          <a:xfrm>
+            <a:off x="0" y="2403093"/>
+            <a:ext cx="4993752" cy="6370149"/>
+          </a:xfrm>
+          <a:prstGeom prst="rect">
+            <a:avLst/>
+          </a:prstGeom>
+        </p:spPr>
+      </p:pic>
       <p:sp>
         <p:nvSpPr>
           <p:cNvPr id="9" name="Rectangle: Single Corner Rounded 8">
@@ -3365,8 +3527,8 @@
         </p:nvSpPr>
         <p:spPr>
           <a:xfrm>
-            <a:off x="99527" y="4006223"/>
-            <a:ext cx="4022255" cy="3762568"/>
+            <a:off x="49763" y="3886130"/>
+            <a:ext cx="4894225" cy="3600986"/>
           </a:xfrm>
           <a:prstGeom prst="rect">
             <a:avLst/>
@@ -3385,49 +3547,57 @@
                   <a:srgbClr val="FFD369"/>
                 </a:solidFill>
               </a:rPr>
-              <a:t>Find </a:t>
-            </a:r>
+              <a:t>Lost </a:t>
+            </a:r>
+            <a:endParaRPr lang="de-DE" sz="7200" dirty="0">
+              <a:solidFill>
+                <a:srgbClr val="0C7B93"/>
+              </a:solidFill>
+            </a:endParaRPr>
+          </a:p>
+          <a:p>
             <a:r>
               <a:rPr lang="de-DE" sz="7200" dirty="0">
                 <a:solidFill>
                   <a:srgbClr val="0C7B93"/>
                 </a:solidFill>
               </a:rPr>
-              <a:t>A</a:t>
-            </a:r>
-          </a:p>
-          <a:p>
-            <a:r>
-              <a:rPr lang="de-DE" sz="7200" dirty="0">
-                <a:solidFill>
-                  <a:srgbClr val="0C7B93"/>
-                </a:solidFill>
-              </a:rPr>
-              <a:t>Misplaced</a:t>
-            </a:r>
-          </a:p>
-          <a:p>
-            <a:r>
-              <a:rPr lang="de-DE" sz="7200" dirty="0">
-                <a:solidFill>
-                  <a:srgbClr val="0C7B93"/>
-                </a:solidFill>
-              </a:rPr>
-              <a:t>Phone</a:t>
-            </a:r>
-          </a:p>
-          <a:p>
-            <a:r>
-              <a:rPr lang="de-DE" sz="2250" dirty="0">
+              <a:t>Your Phone?</a:t>
+            </a:r>
+          </a:p>
+          <a:p>
+            <a:endParaRPr lang="de-DE" sz="2800" dirty="0">
+              <a:solidFill>
+                <a:schemeClr val="accent2">
+                  <a:lumMod val="50000"/>
+                </a:schemeClr>
+              </a:solidFill>
+            </a:endParaRPr>
+          </a:p>
+          <a:p>
+            <a:r>
+              <a:rPr lang="de-DE" sz="2800" dirty="0">
                 <a:solidFill>
                   <a:schemeClr val="accent2">
                     <a:lumMod val="50000"/>
                   </a:schemeClr>
                 </a:solidFill>
               </a:rPr>
-              <a:t>Even in Silent Mode</a:t>
-            </a:r>
-            <a:endParaRPr lang="en-IN" sz="2250" dirty="0">
+              <a:t>Find a Misplaced Phone.</a:t>
+            </a:r>
+          </a:p>
+          <a:p>
+            <a:r>
+              <a:rPr lang="de-DE" sz="2800" dirty="0">
+                <a:solidFill>
+                  <a:schemeClr val="accent2">
+                    <a:lumMod val="50000"/>
+                  </a:schemeClr>
+                </a:solidFill>
+              </a:rPr>
+              <a:t>Even in Silent Mode.</a:t>
+            </a:r>
+            <a:endParaRPr lang="en-IN" sz="2800" dirty="0">
               <a:solidFill>
                 <a:schemeClr val="accent2">
                   <a:lumMod val="50000"/>
@@ -3451,7 +3621,7 @@
         </p:nvGrpSpPr>
         <p:grpSpPr>
           <a:xfrm>
-            <a:off x="4880976" y="4902866"/>
+            <a:off x="4994823" y="4006222"/>
             <a:ext cx="1372134" cy="1476144"/>
             <a:chOff x="8415464" y="2031840"/>
             <a:chExt cx="1309413" cy="1381990"/>
@@ -4062,35 +4232,6 @@
           </p:txBody>
         </p:sp>
       </p:grpSp>
-      <p:pic>
-        <p:nvPicPr>
-          <p:cNvPr id="49" name="Picture 48">
-            <a:extLst>
-              <a:ext uri="{FF2B5EF4-FFF2-40B4-BE49-F238E27FC236}">
-                <a16:creationId xmlns:a16="http://schemas.microsoft.com/office/drawing/2014/main" id="{8948DAB6-3E0B-EB53-C128-87EFAC2F2CC8}"/>
-              </a:ext>
-            </a:extLst>
-          </p:cNvPr>
-          <p:cNvPicPr>
-            <a:picLocks noChangeAspect="1"/>
-          </p:cNvPicPr>
-          <p:nvPr/>
-        </p:nvPicPr>
-        <p:blipFill rotWithShape="1">
-          <a:blip r:embed="rId2"/>
-          <a:srcRect l="20212"/>
-          <a:stretch/>
-        </p:blipFill>
-        <p:spPr>
-          <a:xfrm>
-            <a:off x="-139195" y="2672610"/>
-            <a:ext cx="4640574" cy="5877053"/>
-          </a:xfrm>
-          <a:prstGeom prst="rect">
-            <a:avLst/>
-          </a:prstGeom>
-        </p:spPr>
-      </p:pic>
       <p:grpSp>
         <p:nvGrpSpPr>
           <p:cNvPr id="4" name="Group 3">
@@ -4216,10 +4357,81 @@
           </p:txBody>
         </p:sp>
       </p:grpSp>
+      <p:sp>
+        <p:nvSpPr>
+          <p:cNvPr id="7" name="TextBox 6">
+            <a:extLst>
+              <a:ext uri="{FF2B5EF4-FFF2-40B4-BE49-F238E27FC236}">
+                <a16:creationId xmlns:a16="http://schemas.microsoft.com/office/drawing/2014/main" id="{83944E13-A478-40D9-4364-0FB3C5E781FC}"/>
+              </a:ext>
+            </a:extLst>
+          </p:cNvPr>
+          <p:cNvSpPr txBox="1"/>
+          <p:nvPr/>
+        </p:nvSpPr>
+        <p:spPr>
+          <a:xfrm>
+            <a:off x="557277" y="192849"/>
+            <a:ext cx="5743446" cy="830997"/>
+          </a:xfrm>
+          <a:prstGeom prst="rect">
+            <a:avLst/>
+          </a:prstGeom>
+          <a:noFill/>
+        </p:spPr>
+        <p:txBody>
+          <a:bodyPr wrap="square" rtlCol="0">
+            <a:spAutoFit/>
+          </a:bodyPr>
+          <a:lstStyle/>
+          <a:p>
+            <a:pPr algn="ctr"/>
+            <a:r>
+              <a:rPr lang="de-DE" sz="4800" dirty="0">
+                <a:solidFill>
+                  <a:schemeClr val="accent4">
+                    <a:lumMod val="75000"/>
+                    <a:alpha val="33000"/>
+                  </a:schemeClr>
+                </a:solidFill>
+              </a:rPr>
+              <a:t>Quiet</a:t>
+            </a:r>
+            <a:r>
+              <a:rPr lang="de-DE" sz="4800" dirty="0">
+                <a:solidFill>
+                  <a:srgbClr val="FFD369">
+                    <a:alpha val="33000"/>
+                  </a:srgbClr>
+                </a:solidFill>
+              </a:rPr>
+              <a:t> </a:t>
+            </a:r>
+            <a:r>
+              <a:rPr lang="de-DE" sz="4800" dirty="0">
+                <a:solidFill>
+                  <a:srgbClr val="0C7B93">
+                    <a:alpha val="33000"/>
+                  </a:srgbClr>
+                </a:solidFill>
+              </a:rPr>
+              <a:t>Exceptional</a:t>
+            </a:r>
+            <a:endParaRPr lang="en-IN" sz="4800" dirty="0">
+              <a:solidFill>
+                <a:schemeClr val="accent2">
+                  <a:lumMod val="50000"/>
+                  <a:alpha val="33000"/>
+                </a:schemeClr>
+              </a:solidFill>
+            </a:endParaRPr>
+          </a:p>
+        </p:txBody>
+      </p:sp>
     </p:spTree>
     <p:extLst>
       <p:ext uri="{BB962C8B-B14F-4D97-AF65-F5344CB8AC3E}">
-        <p14:creationId xmlns:p14="http://schemas.microsoft.com/office/powerpoint/2010/main" val="2329543796"/>
+        <p14:creationId xmlns:p14="http://schemas.microsoft.com/office/powerpoint/2010/main" val="488513077"/>
       </p:ext>
     </p:extLst>
   </p:cSld>
@@ -4260,105 +4472,8 @@
         </p:nvSpPr>
         <p:spPr>
           <a:xfrm>
-            <a:off x="4545675" y="4269341"/>
+            <a:off x="4560170" y="2564062"/>
             <a:ext cx="1131732" cy="1153580"/>
-          </a:xfrm>
-          <a:prstGeom prst="ellipse">
-            <a:avLst/>
-          </a:prstGeom>
-          <a:noFill/>
-          <a:ln w="190500">
-            <a:solidFill>
-              <a:schemeClr val="bg2">
-                <a:lumMod val="50000"/>
-              </a:schemeClr>
-            </a:solidFill>
-          </a:ln>
-        </p:spPr>
-        <p:style>
-          <a:lnRef idx="2">
-            <a:schemeClr val="accent1">
-              <a:shade val="15000"/>
-            </a:schemeClr>
-          </a:lnRef>
-          <a:fillRef idx="1">
-            <a:schemeClr val="accent1"/>
-          </a:fillRef>
-          <a:effectRef idx="0">
-            <a:schemeClr val="accent1"/>
-          </a:effectRef>
-          <a:fontRef idx="minor">
-            <a:schemeClr val="lt1"/>
-          </a:fontRef>
-        </p:style>
-        <p:txBody>
-          <a:bodyPr rtlCol="0" anchor="ctr"/>
-          <a:lstStyle/>
-          <a:p>
-            <a:pPr algn="ctr"/>
-            <a:endParaRPr lang="en-IN" sz="1013"/>
-          </a:p>
-        </p:txBody>
-      </p:sp>
-      <p:cxnSp>
-        <p:nvCxnSpPr>
-          <p:cNvPr id="5" name="Straight Connector 4">
-            <a:extLst>
-              <a:ext uri="{FF2B5EF4-FFF2-40B4-BE49-F238E27FC236}">
-                <a16:creationId xmlns:a16="http://schemas.microsoft.com/office/drawing/2014/main" id="{9ED5602B-CD20-DC17-AD6F-2D14EFDE0C99}"/>
-              </a:ext>
-            </a:extLst>
-          </p:cNvPr>
-          <p:cNvCxnSpPr>
-            <a:cxnSpLocks/>
-          </p:cNvCxnSpPr>
-          <p:nvPr/>
-        </p:nvCxnSpPr>
-        <p:spPr>
-          <a:xfrm>
-            <a:off x="4796912" y="4846131"/>
-            <a:ext cx="629258" cy="0"/>
-          </a:xfrm>
-          <a:prstGeom prst="line">
-            <a:avLst/>
-          </a:prstGeom>
-          <a:ln w="254000">
-            <a:solidFill>
-              <a:schemeClr val="tx1"/>
-            </a:solidFill>
-          </a:ln>
-        </p:spPr>
-        <p:style>
-          <a:lnRef idx="1">
-            <a:schemeClr val="accent1"/>
-          </a:lnRef>
-          <a:fillRef idx="0">
-            <a:schemeClr val="accent1"/>
-          </a:fillRef>
-          <a:effectRef idx="0">
-            <a:schemeClr val="accent1"/>
-          </a:effectRef>
-          <a:fontRef idx="minor">
-            <a:schemeClr val="tx1"/>
-          </a:fontRef>
-        </p:style>
-      </p:cxnSp>
-      <p:sp>
-        <p:nvSpPr>
-          <p:cNvPr id="12" name="Oval 11">
-            <a:extLst>
-              <a:ext uri="{FF2B5EF4-FFF2-40B4-BE49-F238E27FC236}">
-                <a16:creationId xmlns:a16="http://schemas.microsoft.com/office/drawing/2014/main" id="{33FBD990-95DD-0136-DBBF-399210413BC0}"/>
-              </a:ext>
-            </a:extLst>
-          </p:cNvPr>
-          <p:cNvSpPr/>
-          <p:nvPr/>
-        </p:nvSpPr>
-        <p:spPr>
-          <a:xfrm>
-            <a:off x="4185693" y="3901221"/>
-            <a:ext cx="1870407" cy="1889820"/>
           </a:xfrm>
           <a:prstGeom prst="ellipse">
             <a:avLst/>
@@ -4395,12 +4510,55 @@
           </a:p>
         </p:txBody>
       </p:sp>
-      <p:sp>
-        <p:nvSpPr>
-          <p:cNvPr id="13" name="Oval 12">
+      <p:cxnSp>
+        <p:nvCxnSpPr>
+          <p:cNvPr id="5" name="Straight Connector 4">
             <a:extLst>
               <a:ext uri="{FF2B5EF4-FFF2-40B4-BE49-F238E27FC236}">
-                <a16:creationId xmlns:a16="http://schemas.microsoft.com/office/drawing/2014/main" id="{9A56EC8F-CF99-19B8-55FD-9EDAA9597C51}"/>
+                <a16:creationId xmlns:a16="http://schemas.microsoft.com/office/drawing/2014/main" id="{9ED5602B-CD20-DC17-AD6F-2D14EFDE0C99}"/>
+              </a:ext>
+            </a:extLst>
+          </p:cNvPr>
+          <p:cNvCxnSpPr>
+            <a:cxnSpLocks/>
+          </p:cNvCxnSpPr>
+          <p:nvPr/>
+        </p:nvCxnSpPr>
+        <p:spPr>
+          <a:xfrm>
+            <a:off x="4811407" y="3140852"/>
+            <a:ext cx="629258" cy="0"/>
+          </a:xfrm>
+          <a:prstGeom prst="line">
+            <a:avLst/>
+          </a:prstGeom>
+          <a:ln w="254000">
+            <a:solidFill>
+              <a:schemeClr val="tx1"/>
+            </a:solidFill>
+          </a:ln>
+        </p:spPr>
+        <p:style>
+          <a:lnRef idx="1">
+            <a:schemeClr val="accent1"/>
+          </a:lnRef>
+          <a:fillRef idx="0">
+            <a:schemeClr val="accent1"/>
+          </a:fillRef>
+          <a:effectRef idx="0">
+            <a:schemeClr val="accent1"/>
+          </a:effectRef>
+          <a:fontRef idx="minor">
+            <a:schemeClr val="tx1"/>
+          </a:fontRef>
+        </p:style>
+      </p:cxnSp>
+      <p:sp>
+        <p:nvSpPr>
+          <p:cNvPr id="12" name="Oval 11">
+            <a:extLst>
+              <a:ext uri="{FF2B5EF4-FFF2-40B4-BE49-F238E27FC236}">
+                <a16:creationId xmlns:a16="http://schemas.microsoft.com/office/drawing/2014/main" id="{33FBD990-95DD-0136-DBBF-399210413BC0}"/>
               </a:ext>
             </a:extLst>
           </p:cNvPr>
@@ -4409,8 +4567,8 @@
         </p:nvSpPr>
         <p:spPr>
           <a:xfrm>
-            <a:off x="3886434" y="3550090"/>
-            <a:ext cx="2412878" cy="2592081"/>
+            <a:off x="4200188" y="2195942"/>
+            <a:ext cx="1870407" cy="1889820"/>
           </a:xfrm>
           <a:prstGeom prst="ellipse">
             <a:avLst/>
@@ -4449,6 +4607,58 @@
       </p:sp>
       <p:sp>
         <p:nvSpPr>
+          <p:cNvPr id="13" name="Oval 12">
+            <a:extLst>
+              <a:ext uri="{FF2B5EF4-FFF2-40B4-BE49-F238E27FC236}">
+                <a16:creationId xmlns:a16="http://schemas.microsoft.com/office/drawing/2014/main" id="{9A56EC8F-CF99-19B8-55FD-9EDAA9597C51}"/>
+              </a:ext>
+            </a:extLst>
+          </p:cNvPr>
+          <p:cNvSpPr/>
+          <p:nvPr/>
+        </p:nvSpPr>
+        <p:spPr>
+          <a:xfrm>
+            <a:off x="3900929" y="1844811"/>
+            <a:ext cx="2412878" cy="2592081"/>
+          </a:xfrm>
+          <a:prstGeom prst="ellipse">
+            <a:avLst/>
+          </a:prstGeom>
+          <a:noFill/>
+          <a:ln w="88900">
+            <a:solidFill>
+              <a:srgbClr val="DDE1ED"/>
+            </a:solidFill>
+          </a:ln>
+        </p:spPr>
+        <p:style>
+          <a:lnRef idx="2">
+            <a:schemeClr val="accent1">
+              <a:shade val="15000"/>
+            </a:schemeClr>
+          </a:lnRef>
+          <a:fillRef idx="1">
+            <a:schemeClr val="accent1"/>
+          </a:fillRef>
+          <a:effectRef idx="0">
+            <a:schemeClr val="accent1"/>
+          </a:effectRef>
+          <a:fontRef idx="minor">
+            <a:schemeClr val="lt1"/>
+          </a:fontRef>
+        </p:style>
+        <p:txBody>
+          <a:bodyPr rtlCol="0" anchor="ctr"/>
+          <a:lstStyle/>
+          <a:p>
+            <a:pPr algn="ctr"/>
+            <a:endParaRPr lang="en-IN" sz="1013"/>
+          </a:p>
+        </p:txBody>
+      </p:sp>
+      <p:sp>
+        <p:nvSpPr>
           <p:cNvPr id="14" name="Oval 13">
             <a:extLst>
               <a:ext uri="{FF2B5EF4-FFF2-40B4-BE49-F238E27FC236}">
@@ -4461,7 +4671,7 @@
         </p:nvSpPr>
         <p:spPr>
           <a:xfrm>
-            <a:off x="3541456" y="3230304"/>
+            <a:off x="3555951" y="1525025"/>
             <a:ext cx="3097852" cy="3231654"/>
           </a:xfrm>
           <a:prstGeom prst="ellipse">
@@ -4503,6 +4713,64 @@
       </p:sp>
       <p:sp>
         <p:nvSpPr>
+          <p:cNvPr id="22" name="Moon 21">
+            <a:extLst>
+              <a:ext uri="{FF2B5EF4-FFF2-40B4-BE49-F238E27FC236}">
+                <a16:creationId xmlns:a16="http://schemas.microsoft.com/office/drawing/2014/main" id="{625112D0-08E6-6BBE-A7C4-25A9AB4B41F1}"/>
+              </a:ext>
+            </a:extLst>
+          </p:cNvPr>
+          <p:cNvSpPr/>
+          <p:nvPr/>
+        </p:nvSpPr>
+        <p:spPr>
+          <a:xfrm rot="747790">
+            <a:off x="244497" y="4112712"/>
+            <a:ext cx="1686676" cy="3438028"/>
+          </a:xfrm>
+          <a:prstGeom prst="moon">
+            <a:avLst>
+              <a:gd name="adj" fmla="val 47344"/>
+            </a:avLst>
+          </a:prstGeom>
+          <a:solidFill>
+            <a:schemeClr val="accent1">
+              <a:lumMod val="40000"/>
+              <a:lumOff val="60000"/>
+              <a:alpha val="39000"/>
+            </a:schemeClr>
+          </a:solidFill>
+          <a:ln>
+            <a:noFill/>
+          </a:ln>
+        </p:spPr>
+        <p:style>
+          <a:lnRef idx="2">
+            <a:schemeClr val="accent1">
+              <a:shade val="15000"/>
+            </a:schemeClr>
+          </a:lnRef>
+          <a:fillRef idx="1">
+            <a:schemeClr val="accent1"/>
+          </a:fillRef>
+          <a:effectRef idx="0">
+            <a:schemeClr val="accent1"/>
+          </a:effectRef>
+          <a:fontRef idx="minor">
+            <a:schemeClr val="lt1"/>
+          </a:fontRef>
+        </p:style>
+        <p:txBody>
+          <a:bodyPr rtlCol="0" anchor="ctr"/>
+          <a:lstStyle/>
+          <a:p>
+            <a:pPr algn="ctr"/>
+            <a:endParaRPr lang="en-IN"/>
+          </a:p>
+        </p:txBody>
+      </p:sp>
+      <p:sp>
+        <p:nvSpPr>
           <p:cNvPr id="3" name="TextBox 2">
             <a:extLst>
               <a:ext uri="{FF2B5EF4-FFF2-40B4-BE49-F238E27FC236}">
@@ -4515,8 +4783,8 @@
         </p:nvSpPr>
         <p:spPr>
           <a:xfrm>
-            <a:off x="-93861" y="2628018"/>
-            <a:ext cx="4353308" cy="3231654"/>
+            <a:off x="103524" y="1205238"/>
+            <a:ext cx="4956037" cy="3231654"/>
           </a:xfrm>
           <a:prstGeom prst="rect">
             <a:avLst/>
@@ -4535,7 +4803,7 @@
                   <a:srgbClr val="FFD369"/>
                 </a:solidFill>
               </a:rPr>
-              <a:t>Minimalist </a:t>
+              <a:t>Minimalistic </a:t>
             </a:r>
           </a:p>
           <a:p>
@@ -4569,147 +4837,279 @@
           </a:p>
         </p:txBody>
       </p:sp>
+      <p:sp>
+        <p:nvSpPr>
+          <p:cNvPr id="24" name="Star: 5 Points 23">
+            <a:extLst>
+              <a:ext uri="{FF2B5EF4-FFF2-40B4-BE49-F238E27FC236}">
+                <a16:creationId xmlns:a16="http://schemas.microsoft.com/office/drawing/2014/main" id="{CE5ED45D-476E-3573-71E8-9FAE88B3CD2B}"/>
+              </a:ext>
+            </a:extLst>
+          </p:cNvPr>
+          <p:cNvSpPr/>
+          <p:nvPr/>
+        </p:nvSpPr>
+        <p:spPr>
+          <a:xfrm rot="20976678">
+            <a:off x="4906465" y="8928065"/>
+            <a:ext cx="1648837" cy="1528324"/>
+          </a:xfrm>
+          <a:prstGeom prst="star5">
+            <a:avLst/>
+          </a:prstGeom>
+          <a:solidFill>
+            <a:schemeClr val="accent4">
+              <a:lumMod val="75000"/>
+              <a:alpha val="18000"/>
+            </a:schemeClr>
+          </a:solidFill>
+          <a:ln>
+            <a:noFill/>
+          </a:ln>
+        </p:spPr>
+        <p:style>
+          <a:lnRef idx="2">
+            <a:schemeClr val="accent1">
+              <a:shade val="15000"/>
+            </a:schemeClr>
+          </a:lnRef>
+          <a:fillRef idx="1">
+            <a:schemeClr val="accent1"/>
+          </a:fillRef>
+          <a:effectRef idx="0">
+            <a:schemeClr val="accent1"/>
+          </a:effectRef>
+          <a:fontRef idx="minor">
+            <a:schemeClr val="lt1"/>
+          </a:fontRef>
+        </p:style>
+        <p:txBody>
+          <a:bodyPr rtlCol="0" anchor="ctr"/>
+          <a:lstStyle/>
+          <a:p>
+            <a:pPr algn="ctr"/>
+            <a:endParaRPr lang="en-IN"/>
+          </a:p>
+        </p:txBody>
+      </p:sp>
+      <p:sp>
+        <p:nvSpPr>
+          <p:cNvPr id="25" name="Star: 5 Points 24">
+            <a:extLst>
+              <a:ext uri="{FF2B5EF4-FFF2-40B4-BE49-F238E27FC236}">
+                <a16:creationId xmlns:a16="http://schemas.microsoft.com/office/drawing/2014/main" id="{20328765-A5C4-7A05-5E91-900209F52918}"/>
+              </a:ext>
+            </a:extLst>
+          </p:cNvPr>
+          <p:cNvSpPr/>
+          <p:nvPr/>
+        </p:nvSpPr>
+        <p:spPr>
+          <a:xfrm rot="800815">
+            <a:off x="3332418" y="5105861"/>
+            <a:ext cx="1648837" cy="1528324"/>
+          </a:xfrm>
+          <a:prstGeom prst="star5">
+            <a:avLst/>
+          </a:prstGeom>
+          <a:solidFill>
+            <a:schemeClr val="accent4">
+              <a:lumMod val="75000"/>
+              <a:alpha val="23000"/>
+            </a:schemeClr>
+          </a:solidFill>
+          <a:ln>
+            <a:noFill/>
+          </a:ln>
+        </p:spPr>
+        <p:style>
+          <a:lnRef idx="2">
+            <a:schemeClr val="accent1">
+              <a:shade val="15000"/>
+            </a:schemeClr>
+          </a:lnRef>
+          <a:fillRef idx="1">
+            <a:schemeClr val="accent1"/>
+          </a:fillRef>
+          <a:effectRef idx="0">
+            <a:schemeClr val="accent1"/>
+          </a:effectRef>
+          <a:fontRef idx="minor">
+            <a:schemeClr val="lt1"/>
+          </a:fontRef>
+        </p:style>
+        <p:txBody>
+          <a:bodyPr rtlCol="0" anchor="ctr"/>
+          <a:lstStyle/>
+          <a:p>
+            <a:pPr algn="ctr"/>
+            <a:endParaRPr lang="en-IN"/>
+          </a:p>
+        </p:txBody>
+      </p:sp>
       <p:pic>
         <p:nvPicPr>
-          <p:cNvPr id="1026" name="Picture 2" descr="Music, music note, music symbol, musical, note, sign icon - Download on  Iconfinder">
+          <p:cNvPr id="8" name="Picture 7">
             <a:extLst>
               <a:ext uri="{FF2B5EF4-FFF2-40B4-BE49-F238E27FC236}">
-                <a16:creationId xmlns:a16="http://schemas.microsoft.com/office/drawing/2014/main" id="{45DE4D2A-0801-8DCE-CCFB-0C10934D006C}"/>
+                <a16:creationId xmlns:a16="http://schemas.microsoft.com/office/drawing/2014/main" id="{281A9F36-46E6-204A-C181-EF5D64B54B11}"/>
               </a:ext>
             </a:extLst>
           </p:cNvPr>
           <p:cNvPicPr>
-            <a:picLocks noChangeAspect="1" noChangeArrowheads="1"/>
+            <a:picLocks noChangeAspect="1"/>
           </p:cNvPicPr>
           <p:nvPr/>
         </p:nvPicPr>
         <p:blipFill>
-          <a:blip r:embed="rId2">
-            <a:extLst>
-              <a:ext uri="{28A0092B-C50C-407E-A947-70E740481C1C}">
-                <a14:useLocalDpi xmlns:a14="http://schemas.microsoft.com/office/drawing/2010/main" val="0"/>
-              </a:ext>
-            </a:extLst>
-          </a:blip>
-          <a:srcRect/>
+          <a:blip r:embed="rId2"/>
           <a:stretch>
             <a:fillRect/>
           </a:stretch>
         </p:blipFill>
-        <p:spPr bwMode="auto">
+        <p:spPr>
           <a:xfrm>
-            <a:off x="1055077" y="7520353"/>
-            <a:ext cx="1014046" cy="1014046"/>
+            <a:off x="1489265" y="6578745"/>
+            <a:ext cx="3879469" cy="3879469"/>
+          </a:xfrm>
+          <a:prstGeom prst="rect">
+            <a:avLst/>
+          </a:prstGeom>
+        </p:spPr>
+      </p:pic>
+      <p:sp>
+        <p:nvSpPr>
+          <p:cNvPr id="9" name="TextBox 8">
+            <a:extLst>
+              <a:ext uri="{FF2B5EF4-FFF2-40B4-BE49-F238E27FC236}">
+                <a16:creationId xmlns:a16="http://schemas.microsoft.com/office/drawing/2014/main" id="{47DC5160-AF87-4D6D-2C53-800B1808C656}"/>
+              </a:ext>
+            </a:extLst>
+          </p:cNvPr>
+          <p:cNvSpPr txBox="1"/>
+          <p:nvPr/>
+        </p:nvSpPr>
+        <p:spPr>
+          <a:xfrm>
+            <a:off x="2477347" y="11023555"/>
+            <a:ext cx="4240456" cy="1077218"/>
           </a:xfrm>
           <a:prstGeom prst="rect">
             <a:avLst/>
           </a:prstGeom>
           <a:noFill/>
-          <a:extLst>
-            <a:ext uri="{909E8E84-426E-40DD-AFC4-6F175D3DCCD1}">
-              <a14:hiddenFill xmlns:a14="http://schemas.microsoft.com/office/drawing/2010/main">
+        </p:spPr>
+        <p:txBody>
+          <a:bodyPr wrap="none" rtlCol="0">
+            <a:spAutoFit/>
+          </a:bodyPr>
+          <a:lstStyle/>
+          <a:p>
+            <a:pPr algn="r"/>
+            <a:r>
+              <a:rPr lang="de-DE" sz="3200" dirty="0">
                 <a:solidFill>
-                  <a:srgbClr val="FFFFFF"/>
+                  <a:schemeClr val="accent2">
+                    <a:lumMod val="50000"/>
+                  </a:schemeClr>
                 </a:solidFill>
-              </a14:hiddenFill>
-            </a:ext>
-          </a:extLst>
-        </p:spPr>
-      </p:pic>
-      <p:pic>
-        <p:nvPicPr>
-          <p:cNvPr id="67" name="Picture 2" descr="Music, music note, music symbol, musical, note, sign icon - Download on  Iconfinder">
+              </a:rPr>
+              <a:t>Missed Call Alerts.</a:t>
+            </a:r>
+          </a:p>
+          <a:p>
+            <a:pPr algn="r"/>
+            <a:r>
+              <a:rPr lang="de-DE" sz="3200" dirty="0">
+                <a:solidFill>
+                  <a:schemeClr val="accent2">
+                    <a:lumMod val="50000"/>
+                  </a:schemeClr>
+                </a:solidFill>
+              </a:rPr>
+              <a:t>Does not disturb babies.</a:t>
+            </a:r>
+            <a:endParaRPr lang="en-IN" sz="3200" dirty="0">
+              <a:solidFill>
+                <a:schemeClr val="accent2">
+                  <a:lumMod val="50000"/>
+                </a:schemeClr>
+              </a:solidFill>
+            </a:endParaRPr>
+          </a:p>
+        </p:txBody>
+      </p:sp>
+      <p:sp>
+        <p:nvSpPr>
+          <p:cNvPr id="4" name="TextBox 3">
             <a:extLst>
               <a:ext uri="{FF2B5EF4-FFF2-40B4-BE49-F238E27FC236}">
-                <a16:creationId xmlns:a16="http://schemas.microsoft.com/office/drawing/2014/main" id="{9563AC94-AC00-5C86-7803-0D51DC29B3F3}"/>
+                <a16:creationId xmlns:a16="http://schemas.microsoft.com/office/drawing/2014/main" id="{BC98FEC5-FEBA-6F73-80C9-F9D6E8A43B5C}"/>
               </a:ext>
             </a:extLst>
           </p:cNvPr>
-          <p:cNvPicPr>
-            <a:picLocks noChangeAspect="1" noChangeArrowheads="1"/>
-          </p:cNvPicPr>
+          <p:cNvSpPr txBox="1"/>
           <p:nvPr/>
-        </p:nvPicPr>
-        <p:blipFill>
-          <a:blip r:embed="rId2">
-            <a:extLst>
-              <a:ext uri="{28A0092B-C50C-407E-A947-70E740481C1C}">
-                <a14:useLocalDpi xmlns:a14="http://schemas.microsoft.com/office/drawing/2010/main" val="0"/>
-              </a:ext>
-            </a:extLst>
-          </a:blip>
-          <a:srcRect/>
-          <a:stretch>
-            <a:fillRect/>
-          </a:stretch>
-        </p:blipFill>
-        <p:spPr bwMode="auto">
+        </p:nvSpPr>
+        <p:spPr>
           <a:xfrm>
-            <a:off x="2872388" y="8121160"/>
-            <a:ext cx="1014046" cy="1014046"/>
+            <a:off x="557277" y="192849"/>
+            <a:ext cx="5743446" cy="830997"/>
           </a:xfrm>
           <a:prstGeom prst="rect">
             <a:avLst/>
           </a:prstGeom>
           <a:noFill/>
-          <a:extLst>
-            <a:ext uri="{909E8E84-426E-40DD-AFC4-6F175D3DCCD1}">
-              <a14:hiddenFill xmlns:a14="http://schemas.microsoft.com/office/drawing/2010/main">
+        </p:spPr>
+        <p:txBody>
+          <a:bodyPr wrap="square" rtlCol="0">
+            <a:spAutoFit/>
+          </a:bodyPr>
+          <a:lstStyle/>
+          <a:p>
+            <a:pPr algn="ctr"/>
+            <a:r>
+              <a:rPr lang="de-DE" sz="4800" dirty="0">
                 <a:solidFill>
-                  <a:srgbClr val="FFFFFF"/>
+                  <a:schemeClr val="accent4">
+                    <a:lumMod val="75000"/>
+                    <a:alpha val="33000"/>
+                  </a:schemeClr>
                 </a:solidFill>
-              </a14:hiddenFill>
-            </a:ext>
-          </a:extLst>
-        </p:spPr>
-      </p:pic>
-      <p:pic>
-        <p:nvPicPr>
-          <p:cNvPr id="68" name="Picture 2" descr="Music, music note, music symbol, musical, note, sign icon - Download on  Iconfinder">
-            <a:extLst>
-              <a:ext uri="{FF2B5EF4-FFF2-40B4-BE49-F238E27FC236}">
-                <a16:creationId xmlns:a16="http://schemas.microsoft.com/office/drawing/2014/main" id="{37A5E772-7B4F-3C8A-24F2-EA5AECE8EA58}"/>
-              </a:ext>
-            </a:extLst>
-          </p:cNvPr>
-          <p:cNvPicPr>
-            <a:picLocks noChangeAspect="1" noChangeArrowheads="1"/>
-          </p:cNvPicPr>
-          <p:nvPr/>
-        </p:nvPicPr>
-        <p:blipFill>
-          <a:blip r:embed="rId2">
-            <a:extLst>
-              <a:ext uri="{28A0092B-C50C-407E-A947-70E740481C1C}">
-                <a14:useLocalDpi xmlns:a14="http://schemas.microsoft.com/office/drawing/2010/main" val="0"/>
-              </a:ext>
-            </a:extLst>
-          </a:blip>
-          <a:srcRect/>
-          <a:stretch>
-            <a:fillRect/>
-          </a:stretch>
-        </p:blipFill>
-        <p:spPr bwMode="auto">
-          <a:xfrm>
-            <a:off x="4412124" y="8751276"/>
-            <a:ext cx="1014046" cy="1014046"/>
-          </a:xfrm>
-          <a:prstGeom prst="rect">
-            <a:avLst/>
-          </a:prstGeom>
-          <a:noFill/>
-          <a:extLst>
-            <a:ext uri="{909E8E84-426E-40DD-AFC4-6F175D3DCCD1}">
-              <a14:hiddenFill xmlns:a14="http://schemas.microsoft.com/office/drawing/2010/main">
+              </a:rPr>
+              <a:t>Quiet</a:t>
+            </a:r>
+            <a:r>
+              <a:rPr lang="de-DE" sz="4800" dirty="0">
                 <a:solidFill>
-                  <a:srgbClr val="FFFFFF"/>
+                  <a:srgbClr val="FFD369">
+                    <a:alpha val="33000"/>
+                  </a:srgbClr>
                 </a:solidFill>
-              </a14:hiddenFill>
-            </a:ext>
-          </a:extLst>
-        </p:spPr>
-      </p:pic>
+              </a:rPr>
+              <a:t> </a:t>
+            </a:r>
+            <a:r>
+              <a:rPr lang="de-DE" sz="4800" dirty="0">
+                <a:solidFill>
+                  <a:srgbClr val="0C7B93">
+                    <a:alpha val="33000"/>
+                  </a:srgbClr>
+                </a:solidFill>
+              </a:rPr>
+              <a:t>Exceptional</a:t>
+            </a:r>
+            <a:endParaRPr lang="en-IN" sz="4800" dirty="0">
+              <a:solidFill>
+                <a:schemeClr val="accent2">
+                  <a:lumMod val="50000"/>
+                  <a:alpha val="33000"/>
+                </a:schemeClr>
+              </a:solidFill>
+            </a:endParaRPr>
+          </a:p>
+        </p:txBody>
+      </p:sp>
     </p:spTree>
     <p:extLst>
       <p:ext uri="{BB962C8B-B14F-4D97-AF65-F5344CB8AC3E}">
@@ -4742,10 +5142,10 @@
       </p:grpSpPr>
       <p:sp>
         <p:nvSpPr>
-          <p:cNvPr id="16" name="Rectangle: Rounded Corners 15">
+          <p:cNvPr id="5" name="Flowchart: Manual Input 4">
             <a:extLst>
               <a:ext uri="{FF2B5EF4-FFF2-40B4-BE49-F238E27FC236}">
-                <a16:creationId xmlns:a16="http://schemas.microsoft.com/office/drawing/2014/main" id="{8E07DF2D-CBF6-4AFB-106E-0C7A493159C8}"/>
+                <a16:creationId xmlns:a16="http://schemas.microsoft.com/office/drawing/2014/main" id="{7BDD0982-1EDF-7685-729E-A72320DF68C2}"/>
               </a:ext>
             </a:extLst>
           </p:cNvPr>
@@ -4753,18 +5153,18 @@
           <p:nvPr/>
         </p:nvSpPr>
         <p:spPr>
-          <a:xfrm>
-            <a:off x="2678010" y="1746436"/>
-            <a:ext cx="1080655" cy="1428779"/>
-          </a:xfrm>
-          <a:prstGeom prst="roundRect">
-            <a:avLst>
-              <a:gd name="adj" fmla="val 35129"/>
-            </a:avLst>
+          <a:xfrm rot="5400000">
+            <a:off x="-4221481" y="4221480"/>
+            <a:ext cx="12192002" cy="3749041"/>
+          </a:xfrm>
+          <a:prstGeom prst="flowChartManualInput">
+            <a:avLst/>
           </a:prstGeom>
           <a:solidFill>
-            <a:schemeClr val="tx2">
-              <a:alpha val="11000"/>
+            <a:schemeClr val="accent1">
+              <a:lumMod val="60000"/>
+              <a:lumOff val="40000"/>
+              <a:alpha val="9000"/>
             </a:schemeClr>
           </a:solidFill>
           <a:ln>
@@ -4809,9 +5209,9 @@
           <p:nvPr/>
         </p:nvSpPr>
         <p:spPr>
-          <a:xfrm rot="20069576">
-            <a:off x="715496" y="3239643"/>
-            <a:ext cx="6382745" cy="3970318"/>
+          <a:xfrm>
+            <a:off x="1487623" y="3760274"/>
+            <a:ext cx="4409885" cy="3970318"/>
           </a:xfrm>
           <a:prstGeom prst="rect">
             <a:avLst/>
@@ -4833,7 +5233,7 @@
                   <a:srgbClr val="FFD369"/>
                 </a:solidFill>
               </a:rPr>
-              <a:t>EEEEAZY </a:t>
+              <a:t>EASY </a:t>
             </a:r>
           </a:p>
           <a:p>
@@ -4872,8 +5272,8 @@
         </p:nvSpPr>
         <p:spPr>
           <a:xfrm>
-            <a:off x="124495" y="8925828"/>
-            <a:ext cx="6561808" cy="2554545"/>
+            <a:off x="148096" y="9497524"/>
+            <a:ext cx="6561808" cy="1938992"/>
           </a:xfrm>
           <a:prstGeom prst="rect">
             <a:avLst/>
@@ -4886,7 +5286,6 @@
           </a:bodyPr>
           <a:lstStyle/>
           <a:p>
-            <a:pPr algn="r"/>
             <a:r>
               <a:rPr lang="de-DE" sz="4000" dirty="0">
                 <a:solidFill>
@@ -4895,11 +5294,8 @@
                   </a:schemeClr>
                 </a:solidFill>
               </a:rPr>
-              <a:t>No Complicated options</a:t>
-            </a:r>
-          </a:p>
-          <a:p>
-            <a:pPr algn="r"/>
+              <a:t>No Complicated options.</a:t>
+            </a:r>
             <a:endParaRPr lang="de-DE" sz="4000" dirty="0">
               <a:solidFill>
                 <a:schemeClr val="bg2">
@@ -4915,8 +5311,17 @@
                   <a:srgbClr val="002060"/>
                 </a:solidFill>
               </a:rPr>
-              <a:t>Just Tap to start and l</a:t>
-            </a:r>
+              <a:t>Just Tap to start.</a:t>
+            </a:r>
+            <a:endParaRPr lang="de-DE" sz="4000" dirty="0">
+              <a:solidFill>
+                <a:schemeClr val="bg2">
+                  <a:lumMod val="25000"/>
+                </a:schemeClr>
+              </a:solidFill>
+            </a:endParaRPr>
+          </a:p>
+          <a:p>
             <a:r>
               <a:rPr lang="de-DE" sz="4000" dirty="0">
                 <a:solidFill>
@@ -4925,7 +5330,7 @@
                   </a:schemeClr>
                 </a:solidFill>
               </a:rPr>
-              <a:t>et the App handle the rest</a:t>
+              <a:t>Let the App handle the rest.</a:t>
             </a:r>
             <a:endParaRPr lang="en-IN" sz="4000" dirty="0">
               <a:solidFill>
@@ -4937,10 +5342,81 @@
       </p:sp>
       <p:sp>
         <p:nvSpPr>
-          <p:cNvPr id="20" name="Rectangle: Rounded Corners 19">
+          <p:cNvPr id="2" name="TextBox 1">
             <a:extLst>
               <a:ext uri="{FF2B5EF4-FFF2-40B4-BE49-F238E27FC236}">
-                <a16:creationId xmlns:a16="http://schemas.microsoft.com/office/drawing/2014/main" id="{7B20A3F9-3508-0328-9EF3-CA1B9507EC07}"/>
+                <a16:creationId xmlns:a16="http://schemas.microsoft.com/office/drawing/2014/main" id="{CFB64C29-30F8-B915-0BF7-E34392A95E68}"/>
+              </a:ext>
+            </a:extLst>
+          </p:cNvPr>
+          <p:cNvSpPr txBox="1"/>
+          <p:nvPr/>
+        </p:nvSpPr>
+        <p:spPr>
+          <a:xfrm>
+            <a:off x="557277" y="192849"/>
+            <a:ext cx="5743446" cy="830997"/>
+          </a:xfrm>
+          <a:prstGeom prst="rect">
+            <a:avLst/>
+          </a:prstGeom>
+          <a:noFill/>
+        </p:spPr>
+        <p:txBody>
+          <a:bodyPr wrap="square" rtlCol="0">
+            <a:spAutoFit/>
+          </a:bodyPr>
+          <a:lstStyle/>
+          <a:p>
+            <a:pPr algn="ctr"/>
+            <a:r>
+              <a:rPr lang="de-DE" sz="4800" dirty="0">
+                <a:solidFill>
+                  <a:schemeClr val="accent4">
+                    <a:lumMod val="75000"/>
+                    <a:alpha val="66000"/>
+                  </a:schemeClr>
+                </a:solidFill>
+              </a:rPr>
+              <a:t>Quiet</a:t>
+            </a:r>
+            <a:r>
+              <a:rPr lang="de-DE" sz="4800" dirty="0">
+                <a:solidFill>
+                  <a:srgbClr val="FFD369">
+                    <a:alpha val="66000"/>
+                  </a:srgbClr>
+                </a:solidFill>
+              </a:rPr>
+              <a:t> </a:t>
+            </a:r>
+            <a:r>
+              <a:rPr lang="de-DE" sz="4800" dirty="0">
+                <a:solidFill>
+                  <a:srgbClr val="0C7B93">
+                    <a:alpha val="66000"/>
+                  </a:srgbClr>
+                </a:solidFill>
+              </a:rPr>
+              <a:t>Exceptional</a:t>
+            </a:r>
+            <a:endParaRPr lang="en-IN" sz="4800" dirty="0">
+              <a:solidFill>
+                <a:schemeClr val="accent2">
+                  <a:lumMod val="50000"/>
+                  <a:alpha val="66000"/>
+                </a:schemeClr>
+              </a:solidFill>
+            </a:endParaRPr>
+          </a:p>
+        </p:txBody>
+      </p:sp>
+      <p:sp>
+        <p:nvSpPr>
+          <p:cNvPr id="6" name="Flowchart: Manual Input 5">
+            <a:extLst>
+              <a:ext uri="{FF2B5EF4-FFF2-40B4-BE49-F238E27FC236}">
+                <a16:creationId xmlns:a16="http://schemas.microsoft.com/office/drawing/2014/main" id="{BEADF76E-8D7D-75E1-9773-9E40FDDC1269}"/>
               </a:ext>
             </a:extLst>
           </p:cNvPr>
@@ -4948,356 +5424,18 @@
           <p:nvPr/>
         </p:nvSpPr>
         <p:spPr>
-          <a:xfrm>
-            <a:off x="203098" y="1783538"/>
-            <a:ext cx="1529523" cy="2219349"/>
-          </a:xfrm>
-          <a:prstGeom prst="roundRect">
-            <a:avLst>
-              <a:gd name="adj" fmla="val 17737"/>
-            </a:avLst>
-          </a:prstGeom>
-          <a:solidFill>
-            <a:schemeClr val="accent4">
-              <a:lumMod val="60000"/>
-              <a:lumOff val="40000"/>
-              <a:alpha val="11000"/>
-            </a:schemeClr>
-          </a:solidFill>
-          <a:ln>
-            <a:noFill/>
-          </a:ln>
-        </p:spPr>
-        <p:style>
-          <a:lnRef idx="2">
-            <a:schemeClr val="accent1">
-              <a:shade val="15000"/>
-            </a:schemeClr>
-          </a:lnRef>
-          <a:fillRef idx="1">
-            <a:schemeClr val="accent1"/>
-          </a:fillRef>
-          <a:effectRef idx="0">
-            <a:schemeClr val="accent1"/>
-          </a:effectRef>
-          <a:fontRef idx="minor">
-            <a:schemeClr val="lt1"/>
-          </a:fontRef>
-        </p:style>
-        <p:txBody>
-          <a:bodyPr rtlCol="0" anchor="ctr"/>
-          <a:lstStyle/>
-          <a:p>
-            <a:pPr algn="ctr"/>
-            <a:endParaRPr lang="en-IN"/>
-          </a:p>
-        </p:txBody>
-      </p:sp>
-      <p:sp>
-        <p:nvSpPr>
-          <p:cNvPr id="23" name="Rectangle: Rounded Corners 22">
-            <a:extLst>
-              <a:ext uri="{FF2B5EF4-FFF2-40B4-BE49-F238E27FC236}">
-                <a16:creationId xmlns:a16="http://schemas.microsoft.com/office/drawing/2014/main" id="{390CFCCC-4A58-2655-A2D7-AA43FFFC0356}"/>
-              </a:ext>
-            </a:extLst>
-          </p:cNvPr>
-          <p:cNvSpPr/>
-          <p:nvPr/>
-        </p:nvSpPr>
-        <p:spPr>
-          <a:xfrm>
-            <a:off x="125395" y="96073"/>
-            <a:ext cx="5974358" cy="1428779"/>
-          </a:xfrm>
-          <a:prstGeom prst="roundRect">
-            <a:avLst>
-              <a:gd name="adj" fmla="val 35129"/>
-            </a:avLst>
-          </a:prstGeom>
-          <a:solidFill>
-            <a:schemeClr val="tx1">
-              <a:alpha val="11000"/>
-            </a:schemeClr>
-          </a:solidFill>
-          <a:ln>
-            <a:noFill/>
-          </a:ln>
-        </p:spPr>
-        <p:style>
-          <a:lnRef idx="2">
-            <a:schemeClr val="accent1">
-              <a:shade val="15000"/>
-            </a:schemeClr>
-          </a:lnRef>
-          <a:fillRef idx="1">
-            <a:schemeClr val="accent1"/>
-          </a:fillRef>
-          <a:effectRef idx="0">
-            <a:schemeClr val="accent1"/>
-          </a:effectRef>
-          <a:fontRef idx="minor">
-            <a:schemeClr val="lt1"/>
-          </a:fontRef>
-        </p:style>
-        <p:txBody>
-          <a:bodyPr rtlCol="0" anchor="ctr"/>
-          <a:lstStyle/>
-          <a:p>
-            <a:pPr algn="ctr"/>
-            <a:endParaRPr lang="en-IN"/>
-          </a:p>
-        </p:txBody>
-      </p:sp>
-      <p:sp>
-        <p:nvSpPr>
-          <p:cNvPr id="24" name="Rectangle: Rounded Corners 23">
-            <a:extLst>
-              <a:ext uri="{FF2B5EF4-FFF2-40B4-BE49-F238E27FC236}">
-                <a16:creationId xmlns:a16="http://schemas.microsoft.com/office/drawing/2014/main" id="{107D5C82-EC6B-9A8C-7BE9-F30EE13451E0}"/>
-              </a:ext>
-            </a:extLst>
-          </p:cNvPr>
-          <p:cNvSpPr/>
-          <p:nvPr/>
-        </p:nvSpPr>
-        <p:spPr>
-          <a:xfrm>
-            <a:off x="5237036" y="3587433"/>
-            <a:ext cx="1554497" cy="1987660"/>
-          </a:xfrm>
-          <a:prstGeom prst="roundRect">
-            <a:avLst>
-              <a:gd name="adj" fmla="val 50000"/>
-            </a:avLst>
-          </a:prstGeom>
-          <a:solidFill>
-            <a:srgbClr val="0070C0">
-              <a:alpha val="11000"/>
-            </a:srgbClr>
-          </a:solidFill>
-          <a:ln>
-            <a:noFill/>
-          </a:ln>
-        </p:spPr>
-        <p:style>
-          <a:lnRef idx="2">
-            <a:schemeClr val="accent1">
-              <a:shade val="15000"/>
-            </a:schemeClr>
-          </a:lnRef>
-          <a:fillRef idx="1">
-            <a:schemeClr val="accent1"/>
-          </a:fillRef>
-          <a:effectRef idx="0">
-            <a:schemeClr val="accent1"/>
-          </a:effectRef>
-          <a:fontRef idx="minor">
-            <a:schemeClr val="lt1"/>
-          </a:fontRef>
-        </p:style>
-        <p:txBody>
-          <a:bodyPr rtlCol="0" anchor="ctr"/>
-          <a:lstStyle/>
-          <a:p>
-            <a:pPr algn="ctr"/>
-            <a:endParaRPr lang="en-IN"/>
-          </a:p>
-        </p:txBody>
-      </p:sp>
-      <p:sp>
-        <p:nvSpPr>
-          <p:cNvPr id="26" name="Rectangle: Rounded Corners 25">
-            <a:extLst>
-              <a:ext uri="{FF2B5EF4-FFF2-40B4-BE49-F238E27FC236}">
-                <a16:creationId xmlns:a16="http://schemas.microsoft.com/office/drawing/2014/main" id="{4DA77235-A60A-12E7-0CA4-AC7D0D4A78C5}"/>
-              </a:ext>
-            </a:extLst>
-          </p:cNvPr>
-          <p:cNvSpPr/>
-          <p:nvPr/>
-        </p:nvSpPr>
-        <p:spPr>
-          <a:xfrm>
-            <a:off x="124495" y="7152439"/>
-            <a:ext cx="1080655" cy="1428779"/>
-          </a:xfrm>
-          <a:prstGeom prst="roundRect">
-            <a:avLst>
-              <a:gd name="adj" fmla="val 35129"/>
-            </a:avLst>
-          </a:prstGeom>
-          <a:solidFill>
-            <a:srgbClr val="00B050">
-              <a:alpha val="11000"/>
-            </a:srgbClr>
-          </a:solidFill>
-          <a:ln>
-            <a:noFill/>
-          </a:ln>
-        </p:spPr>
-        <p:style>
-          <a:lnRef idx="2">
-            <a:schemeClr val="accent1">
-              <a:shade val="15000"/>
-            </a:schemeClr>
-          </a:lnRef>
-          <a:fillRef idx="1">
-            <a:schemeClr val="accent1"/>
-          </a:fillRef>
-          <a:effectRef idx="0">
-            <a:schemeClr val="accent1"/>
-          </a:effectRef>
-          <a:fontRef idx="minor">
-            <a:schemeClr val="lt1"/>
-          </a:fontRef>
-        </p:style>
-        <p:txBody>
-          <a:bodyPr rtlCol="0" anchor="ctr"/>
-          <a:lstStyle/>
-          <a:p>
-            <a:pPr algn="ctr"/>
-            <a:endParaRPr lang="en-IN"/>
-          </a:p>
-        </p:txBody>
-      </p:sp>
-      <p:sp>
-        <p:nvSpPr>
-          <p:cNvPr id="27" name="Isosceles Triangle 26">
-            <a:extLst>
-              <a:ext uri="{FF2B5EF4-FFF2-40B4-BE49-F238E27FC236}">
-                <a16:creationId xmlns:a16="http://schemas.microsoft.com/office/drawing/2014/main" id="{1A812F26-459E-87A2-423B-1ACEBBC8F149}"/>
-              </a:ext>
-            </a:extLst>
-          </p:cNvPr>
-          <p:cNvSpPr/>
-          <p:nvPr/>
-        </p:nvSpPr>
-        <p:spPr>
-          <a:xfrm rot="5400000">
-            <a:off x="2337672" y="4986326"/>
-            <a:ext cx="2294312" cy="2219349"/>
-          </a:xfrm>
-          <a:prstGeom prst="triangle">
+          <a:xfrm rot="16200000">
+            <a:off x="-1267134" y="4066866"/>
+            <a:ext cx="12384852" cy="3865419"/>
+          </a:xfrm>
+          <a:prstGeom prst="flowChartManualInput">
             <a:avLst/>
           </a:prstGeom>
           <a:solidFill>
-            <a:srgbClr val="640000">
-              <a:alpha val="11000"/>
-            </a:srgbClr>
-          </a:solidFill>
-          <a:ln>
-            <a:noFill/>
-          </a:ln>
-        </p:spPr>
-        <p:style>
-          <a:lnRef idx="2">
-            <a:schemeClr val="accent1">
-              <a:shade val="15000"/>
+            <a:schemeClr val="accent2">
+              <a:lumMod val="75000"/>
+              <a:alpha val="10000"/>
             </a:schemeClr>
-          </a:lnRef>
-          <a:fillRef idx="1">
-            <a:schemeClr val="accent1"/>
-          </a:fillRef>
-          <a:effectRef idx="0">
-            <a:schemeClr val="accent1"/>
-          </a:effectRef>
-          <a:fontRef idx="minor">
-            <a:schemeClr val="lt1"/>
-          </a:fontRef>
-        </p:style>
-        <p:txBody>
-          <a:bodyPr rtlCol="0" anchor="ctr"/>
-          <a:lstStyle/>
-          <a:p>
-            <a:pPr algn="ctr"/>
-            <a:endParaRPr lang="en-IN"/>
-          </a:p>
-        </p:txBody>
-      </p:sp>
-      <p:sp>
-        <p:nvSpPr>
-          <p:cNvPr id="31" name="Rectangle: Rounded Corners 30">
-            <a:extLst>
-              <a:ext uri="{FF2B5EF4-FFF2-40B4-BE49-F238E27FC236}">
-                <a16:creationId xmlns:a16="http://schemas.microsoft.com/office/drawing/2014/main" id="{1E687132-3172-2ECC-855C-AF7567A2B238}"/>
-              </a:ext>
-            </a:extLst>
-          </p:cNvPr>
-          <p:cNvSpPr/>
-          <p:nvPr/>
-        </p:nvSpPr>
-        <p:spPr>
-          <a:xfrm>
-            <a:off x="5224178" y="7156370"/>
-            <a:ext cx="1080655" cy="1428779"/>
-          </a:xfrm>
-          <a:prstGeom prst="roundRect">
-            <a:avLst>
-              <a:gd name="adj" fmla="val 35129"/>
-            </a:avLst>
-          </a:prstGeom>
-          <a:solidFill>
-            <a:schemeClr val="accent3">
-              <a:lumMod val="75000"/>
-              <a:alpha val="11000"/>
-            </a:schemeClr>
-          </a:solidFill>
-          <a:ln>
-            <a:noFill/>
-          </a:ln>
-        </p:spPr>
-        <p:style>
-          <a:lnRef idx="2">
-            <a:schemeClr val="accent1">
-              <a:shade val="15000"/>
-            </a:schemeClr>
-          </a:lnRef>
-          <a:fillRef idx="1">
-            <a:schemeClr val="accent1"/>
-          </a:fillRef>
-          <a:effectRef idx="0">
-            <a:schemeClr val="accent1"/>
-          </a:effectRef>
-          <a:fontRef idx="minor">
-            <a:schemeClr val="lt1"/>
-          </a:fontRef>
-        </p:style>
-        <p:txBody>
-          <a:bodyPr rtlCol="0" anchor="ctr"/>
-          <a:lstStyle/>
-          <a:p>
-            <a:pPr algn="ctr"/>
-            <a:endParaRPr lang="en-IN"/>
-          </a:p>
-        </p:txBody>
-      </p:sp>
-      <p:sp>
-        <p:nvSpPr>
-          <p:cNvPr id="64" name="Rectangle: Rounded Corners 63">
-            <a:extLst>
-              <a:ext uri="{FF2B5EF4-FFF2-40B4-BE49-F238E27FC236}">
-                <a16:creationId xmlns:a16="http://schemas.microsoft.com/office/drawing/2014/main" id="{A7C9632B-EE89-CCF9-9E40-EA13D57A5A2F}"/>
-              </a:ext>
-            </a:extLst>
-          </p:cNvPr>
-          <p:cNvSpPr/>
-          <p:nvPr/>
-        </p:nvSpPr>
-        <p:spPr>
-          <a:xfrm>
-            <a:off x="4478770" y="10133145"/>
-            <a:ext cx="1080655" cy="1428779"/>
-          </a:xfrm>
-          <a:prstGeom prst="roundRect">
-            <a:avLst>
-              <a:gd name="adj" fmla="val 35129"/>
-            </a:avLst>
-          </a:prstGeom>
-          <a:solidFill>
-            <a:srgbClr val="92D050">
-              <a:alpha val="11000"/>
-            </a:srgbClr>
           </a:solidFill>
           <a:ln>
             <a:noFill/>
@@ -5360,65 +5498,6 @@
       </p:grpSpPr>
       <p:sp>
         <p:nvSpPr>
-          <p:cNvPr id="3" name="TextBox 2">
-            <a:extLst>
-              <a:ext uri="{FF2B5EF4-FFF2-40B4-BE49-F238E27FC236}">
-                <a16:creationId xmlns:a16="http://schemas.microsoft.com/office/drawing/2014/main" id="{197DC2D2-644E-4E7D-E858-A90F1A77D396}"/>
-              </a:ext>
-            </a:extLst>
-          </p:cNvPr>
-          <p:cNvSpPr txBox="1"/>
-          <p:nvPr/>
-        </p:nvSpPr>
-        <p:spPr>
-          <a:xfrm>
-            <a:off x="-435081" y="1095884"/>
-            <a:ext cx="7680960" cy="3939540"/>
-          </a:xfrm>
-          <a:prstGeom prst="rect">
-            <a:avLst/>
-          </a:prstGeom>
-          <a:noFill/>
-          <a:ln w="63500">
-            <a:noFill/>
-          </a:ln>
-        </p:spPr>
-        <p:txBody>
-          <a:bodyPr wrap="square" rtlCol="0">
-            <a:spAutoFit/>
-          </a:bodyPr>
-          <a:lstStyle/>
-          <a:p>
-            <a:pPr algn="ctr"/>
-            <a:r>
-              <a:rPr lang="de-DE" sz="10000" dirty="0">
-                <a:solidFill>
-                  <a:srgbClr val="FFD369"/>
-                </a:solidFill>
-              </a:rPr>
-              <a:t>Maximum</a:t>
-            </a:r>
-          </a:p>
-          <a:p>
-            <a:pPr algn="ctr"/>
-            <a:r>
-              <a:rPr lang="de-DE" sz="15000" dirty="0">
-                <a:solidFill>
-                  <a:srgbClr val="0C7B93"/>
-                </a:solidFill>
-              </a:rPr>
-              <a:t>Privacy</a:t>
-            </a:r>
-            <a:endParaRPr lang="de-DE" sz="15000" dirty="0">
-              <a:solidFill>
-                <a:srgbClr val="800000"/>
-              </a:solidFill>
-            </a:endParaRPr>
-          </a:p>
-        </p:txBody>
-      </p:sp>
-      <p:sp>
-        <p:nvSpPr>
           <p:cNvPr id="4" name="TextBox 3">
             <a:extLst>
               <a:ext uri="{FF2B5EF4-FFF2-40B4-BE49-F238E27FC236}">
@@ -5431,8 +5510,8 @@
         </p:nvSpPr>
         <p:spPr>
           <a:xfrm>
-            <a:off x="124495" y="8492188"/>
-            <a:ext cx="6561808" cy="3170099"/>
+            <a:off x="124495" y="8925828"/>
+            <a:ext cx="6561808" cy="1938992"/>
           </a:xfrm>
           <a:prstGeom prst="rect">
             <a:avLst/>
@@ -5449,34 +5528,10 @@
             <a:r>
               <a:rPr lang="de-DE" sz="4000" dirty="0">
                 <a:solidFill>
-                  <a:schemeClr val="bg2">
-                    <a:lumMod val="10000"/>
-                  </a:schemeClr>
+                  <a:srgbClr val="800000"/>
                 </a:solidFill>
               </a:rPr>
-              <a:t>No User Data leaves the Device without active user action.</a:t>
-            </a:r>
-          </a:p>
-          <a:p>
-            <a:pPr algn="r"/>
-            <a:endParaRPr lang="de-DE" sz="4000" dirty="0">
-              <a:solidFill>
-                <a:schemeClr val="accent2">
-                  <a:lumMod val="50000"/>
-                </a:schemeClr>
-              </a:solidFill>
-            </a:endParaRPr>
-          </a:p>
-          <a:p>
-            <a:r>
-              <a:rPr lang="de-DE" sz="4000" dirty="0">
-                <a:solidFill>
-                  <a:schemeClr val="accent2">
-                    <a:lumMod val="50000"/>
-                  </a:schemeClr>
-                </a:solidFill>
-              </a:rPr>
-              <a:t>No Internet Required</a:t>
+              <a:t>So you dont have to worry about switching back to a ringer mode.</a:t>
             </a:r>
             <a:endParaRPr lang="en-IN" sz="4000" dirty="0">
               <a:solidFill>
@@ -5488,10 +5543,10 @@
       </p:sp>
       <p:grpSp>
         <p:nvGrpSpPr>
-          <p:cNvPr id="8" name="Group 7">
+          <p:cNvPr id="6" name="Group 5">
             <a:extLst>
               <a:ext uri="{FF2B5EF4-FFF2-40B4-BE49-F238E27FC236}">
-                <a16:creationId xmlns:a16="http://schemas.microsoft.com/office/drawing/2014/main" id="{9A0E98CA-CA0F-CBF3-BF76-0EB2CB5E68D8}"/>
+                <a16:creationId xmlns:a16="http://schemas.microsoft.com/office/drawing/2014/main" id="{30B43D7B-3390-27E3-C584-A25B70074548}"/>
               </a:ext>
             </a:extLst>
           </p:cNvPr>
@@ -5500,18 +5555,18 @@
         </p:nvGrpSpPr>
         <p:grpSpPr>
           <a:xfrm>
-            <a:off x="2715072" y="5035424"/>
-            <a:ext cx="1779666" cy="1566842"/>
-            <a:chOff x="2539167" y="5769346"/>
-            <a:chExt cx="1779666" cy="1566842"/>
+            <a:off x="549617" y="5684885"/>
+            <a:ext cx="1047404" cy="2411711"/>
+            <a:chOff x="814647" y="5684885"/>
+            <a:chExt cx="1047404" cy="2411711"/>
           </a:xfrm>
         </p:grpSpPr>
         <p:sp>
           <p:nvSpPr>
-            <p:cNvPr id="5" name="Block Arc 4">
+            <p:cNvPr id="2" name="Trapezoid 1">
               <a:extLst>
                 <a:ext uri="{FF2B5EF4-FFF2-40B4-BE49-F238E27FC236}">
-                  <a16:creationId xmlns:a16="http://schemas.microsoft.com/office/drawing/2014/main" id="{0DC70805-2A6D-DADA-3990-0AB3A62D2859}"/>
+                  <a16:creationId xmlns:a16="http://schemas.microsoft.com/office/drawing/2014/main" id="{60920D79-2E25-E7DE-56DC-6C106A20F764}"/>
                 </a:ext>
               </a:extLst>
             </p:cNvPr>
@@ -5520,17 +5575,767 @@
           </p:nvSpPr>
           <p:spPr>
             <a:xfrm>
-              <a:off x="2539167" y="5769346"/>
-              <a:ext cx="1779666" cy="1230284"/>
+              <a:off x="814647" y="6417425"/>
+              <a:ext cx="1047404" cy="1679171"/>
+            </a:xfrm>
+            <a:prstGeom prst="trapezoid">
+              <a:avLst/>
+            </a:prstGeom>
+            <a:ln>
+              <a:noFill/>
+            </a:ln>
+          </p:spPr>
+          <p:style>
+            <a:lnRef idx="2">
+              <a:schemeClr val="dk1">
+                <a:shade val="15000"/>
+              </a:schemeClr>
+            </a:lnRef>
+            <a:fillRef idx="1">
+              <a:schemeClr val="dk1"/>
+            </a:fillRef>
+            <a:effectRef idx="0">
+              <a:schemeClr val="dk1"/>
+            </a:effectRef>
+            <a:fontRef idx="minor">
+              <a:schemeClr val="lt1"/>
+            </a:fontRef>
+          </p:style>
+          <p:txBody>
+            <a:bodyPr rtlCol="0" anchor="ctr"/>
+            <a:lstStyle/>
+            <a:p>
+              <a:pPr algn="ctr"/>
+              <a:endParaRPr lang="en-IN"/>
+            </a:p>
+          </p:txBody>
+        </p:sp>
+        <p:sp>
+          <p:nvSpPr>
+            <p:cNvPr id="5" name="Oval 4">
+              <a:extLst>
+                <a:ext uri="{FF2B5EF4-FFF2-40B4-BE49-F238E27FC236}">
+                  <a16:creationId xmlns:a16="http://schemas.microsoft.com/office/drawing/2014/main" id="{3241DCE3-3BD7-F7F7-4776-A83198C789A9}"/>
+                </a:ext>
+              </a:extLst>
+            </p:cNvPr>
+            <p:cNvSpPr/>
+            <p:nvPr/>
+          </p:nvSpPr>
+          <p:spPr>
+            <a:xfrm>
+              <a:off x="1022465" y="5684885"/>
+              <a:ext cx="631767" cy="598516"/>
+            </a:xfrm>
+            <a:prstGeom prst="ellipse">
+              <a:avLst/>
+            </a:prstGeom>
+          </p:spPr>
+          <p:style>
+            <a:lnRef idx="2">
+              <a:schemeClr val="dk1">
+                <a:shade val="15000"/>
+              </a:schemeClr>
+            </a:lnRef>
+            <a:fillRef idx="1">
+              <a:schemeClr val="dk1"/>
+            </a:fillRef>
+            <a:effectRef idx="0">
+              <a:schemeClr val="dk1"/>
+            </a:effectRef>
+            <a:fontRef idx="minor">
+              <a:schemeClr val="lt1"/>
+            </a:fontRef>
+          </p:style>
+          <p:txBody>
+            <a:bodyPr rtlCol="0" anchor="ctr"/>
+            <a:lstStyle/>
+            <a:p>
+              <a:pPr algn="ctr"/>
+              <a:endParaRPr lang="en-IN"/>
+            </a:p>
+          </p:txBody>
+        </p:sp>
+      </p:grpSp>
+      <p:grpSp>
+        <p:nvGrpSpPr>
+          <p:cNvPr id="7" name="Group 6">
+            <a:extLst>
+              <a:ext uri="{FF2B5EF4-FFF2-40B4-BE49-F238E27FC236}">
+                <a16:creationId xmlns:a16="http://schemas.microsoft.com/office/drawing/2014/main" id="{6F944B8E-FEE8-7D7B-1D94-BBFBF73F3CD8}"/>
+              </a:ext>
+            </a:extLst>
+          </p:cNvPr>
+          <p:cNvGrpSpPr/>
+          <p:nvPr/>
+        </p:nvGrpSpPr>
+        <p:grpSpPr>
+          <a:xfrm>
+            <a:off x="5129514" y="5684885"/>
+            <a:ext cx="1047404" cy="2411711"/>
+            <a:chOff x="814647" y="5684885"/>
+            <a:chExt cx="1047404" cy="2411711"/>
+          </a:xfrm>
+        </p:grpSpPr>
+        <p:sp>
+          <p:nvSpPr>
+            <p:cNvPr id="8" name="Trapezoid 7">
+              <a:extLst>
+                <a:ext uri="{FF2B5EF4-FFF2-40B4-BE49-F238E27FC236}">
+                  <a16:creationId xmlns:a16="http://schemas.microsoft.com/office/drawing/2014/main" id="{0C774B9F-AF9D-08A7-3BCC-C168AB5E11AF}"/>
+                </a:ext>
+              </a:extLst>
+            </p:cNvPr>
+            <p:cNvSpPr/>
+            <p:nvPr/>
+          </p:nvSpPr>
+          <p:spPr>
+            <a:xfrm>
+              <a:off x="814647" y="6417425"/>
+              <a:ext cx="1047404" cy="1679171"/>
+            </a:xfrm>
+            <a:prstGeom prst="trapezoid">
+              <a:avLst/>
+            </a:prstGeom>
+          </p:spPr>
+          <p:style>
+            <a:lnRef idx="2">
+              <a:schemeClr val="dk1">
+                <a:shade val="15000"/>
+              </a:schemeClr>
+            </a:lnRef>
+            <a:fillRef idx="1">
+              <a:schemeClr val="dk1"/>
+            </a:fillRef>
+            <a:effectRef idx="0">
+              <a:schemeClr val="dk1"/>
+            </a:effectRef>
+            <a:fontRef idx="minor">
+              <a:schemeClr val="lt1"/>
+            </a:fontRef>
+          </p:style>
+          <p:txBody>
+            <a:bodyPr rtlCol="0" anchor="ctr"/>
+            <a:lstStyle/>
+            <a:p>
+              <a:pPr algn="ctr"/>
+              <a:endParaRPr lang="en-IN"/>
+            </a:p>
+          </p:txBody>
+        </p:sp>
+        <p:sp>
+          <p:nvSpPr>
+            <p:cNvPr id="9" name="Oval 8">
+              <a:extLst>
+                <a:ext uri="{FF2B5EF4-FFF2-40B4-BE49-F238E27FC236}">
+                  <a16:creationId xmlns:a16="http://schemas.microsoft.com/office/drawing/2014/main" id="{90BB941B-B479-FF80-8CE3-6609309AD989}"/>
+                </a:ext>
+              </a:extLst>
+            </p:cNvPr>
+            <p:cNvSpPr/>
+            <p:nvPr/>
+          </p:nvSpPr>
+          <p:spPr>
+            <a:xfrm>
+              <a:off x="1022465" y="5684885"/>
+              <a:ext cx="631767" cy="598516"/>
+            </a:xfrm>
+            <a:prstGeom prst="ellipse">
+              <a:avLst/>
+            </a:prstGeom>
+          </p:spPr>
+          <p:style>
+            <a:lnRef idx="2">
+              <a:schemeClr val="dk1">
+                <a:shade val="15000"/>
+              </a:schemeClr>
+            </a:lnRef>
+            <a:fillRef idx="1">
+              <a:schemeClr val="dk1"/>
+            </a:fillRef>
+            <a:effectRef idx="0">
+              <a:schemeClr val="dk1"/>
+            </a:effectRef>
+            <a:fontRef idx="minor">
+              <a:schemeClr val="lt1"/>
+            </a:fontRef>
+          </p:style>
+          <p:txBody>
+            <a:bodyPr rtlCol="0" anchor="ctr"/>
+            <a:lstStyle/>
+            <a:p>
+              <a:pPr algn="ctr"/>
+              <a:endParaRPr lang="en-IN"/>
+            </a:p>
+          </p:txBody>
+        </p:sp>
+      </p:grpSp>
+      <p:sp>
+        <p:nvSpPr>
+          <p:cNvPr id="12" name="Speech Bubble: Oval 11">
+            <a:extLst>
+              <a:ext uri="{FF2B5EF4-FFF2-40B4-BE49-F238E27FC236}">
+                <a16:creationId xmlns:a16="http://schemas.microsoft.com/office/drawing/2014/main" id="{2A4508B8-5675-6909-EF32-5774B4C4A852}"/>
+              </a:ext>
+            </a:extLst>
+          </p:cNvPr>
+          <p:cNvSpPr/>
+          <p:nvPr/>
+        </p:nvSpPr>
+        <p:spPr>
+          <a:xfrm>
+            <a:off x="1329381" y="4970703"/>
+            <a:ext cx="2099619" cy="973024"/>
+          </a:xfrm>
+          <a:prstGeom prst="wedgeEllipseCallout">
+            <a:avLst>
+              <a:gd name="adj1" fmla="val -35086"/>
+              <a:gd name="adj2" fmla="val 71043"/>
+            </a:avLst>
+          </a:prstGeom>
+          <a:solidFill>
+            <a:schemeClr val="bg2">
+              <a:lumMod val="25000"/>
+            </a:schemeClr>
+          </a:solidFill>
+          <a:ln>
+            <a:noFill/>
+          </a:ln>
+        </p:spPr>
+        <p:style>
+          <a:lnRef idx="2">
+            <a:schemeClr val="accent1">
+              <a:shade val="15000"/>
+            </a:schemeClr>
+          </a:lnRef>
+          <a:fillRef idx="1">
+            <a:schemeClr val="accent1"/>
+          </a:fillRef>
+          <a:effectRef idx="0">
+            <a:schemeClr val="accent1"/>
+          </a:effectRef>
+          <a:fontRef idx="minor">
+            <a:schemeClr val="lt1"/>
+          </a:fontRef>
+        </p:style>
+        <p:txBody>
+          <a:bodyPr rtlCol="0" anchor="ctr"/>
+          <a:lstStyle/>
+          <a:p>
+            <a:pPr algn="ctr"/>
+            <a:endParaRPr lang="en-IN"/>
+          </a:p>
+        </p:txBody>
+      </p:sp>
+      <p:sp>
+        <p:nvSpPr>
+          <p:cNvPr id="13" name="Speech Bubble: Oval 12">
+            <a:extLst>
+              <a:ext uri="{FF2B5EF4-FFF2-40B4-BE49-F238E27FC236}">
+                <a16:creationId xmlns:a16="http://schemas.microsoft.com/office/drawing/2014/main" id="{A27D4BDE-DFEE-E024-E514-EE9EF77D764A}"/>
+              </a:ext>
+            </a:extLst>
+          </p:cNvPr>
+          <p:cNvSpPr/>
+          <p:nvPr/>
+        </p:nvSpPr>
+        <p:spPr>
+          <a:xfrm>
+            <a:off x="2913648" y="4660139"/>
+            <a:ext cx="2307034" cy="1239313"/>
+          </a:xfrm>
+          <a:prstGeom prst="wedgeEllipseCallout">
+            <a:avLst>
+              <a:gd name="adj1" fmla="val 47210"/>
+              <a:gd name="adj2" fmla="val 62487"/>
+            </a:avLst>
+          </a:prstGeom>
+          <a:solidFill>
+            <a:schemeClr val="bg2">
+              <a:lumMod val="75000"/>
+            </a:schemeClr>
+          </a:solidFill>
+          <a:ln>
+            <a:noFill/>
+          </a:ln>
+        </p:spPr>
+        <p:style>
+          <a:lnRef idx="2">
+            <a:schemeClr val="accent1">
+              <a:shade val="15000"/>
+            </a:schemeClr>
+          </a:lnRef>
+          <a:fillRef idx="1">
+            <a:schemeClr val="accent1"/>
+          </a:fillRef>
+          <a:effectRef idx="0">
+            <a:schemeClr val="accent1"/>
+          </a:effectRef>
+          <a:fontRef idx="minor">
+            <a:schemeClr val="lt1"/>
+          </a:fontRef>
+        </p:style>
+        <p:txBody>
+          <a:bodyPr rtlCol="0" anchor="ctr"/>
+          <a:lstStyle/>
+          <a:p>
+            <a:pPr algn="ctr"/>
+            <a:endParaRPr lang="en-IN"/>
+          </a:p>
+        </p:txBody>
+      </p:sp>
+      <p:sp>
+        <p:nvSpPr>
+          <p:cNvPr id="14" name="Rectangle: Rounded Corners 13">
+            <a:extLst>
+              <a:ext uri="{FF2B5EF4-FFF2-40B4-BE49-F238E27FC236}">
+                <a16:creationId xmlns:a16="http://schemas.microsoft.com/office/drawing/2014/main" id="{4AD7E35A-2E5C-5333-87D4-05DC86E4C5DC}"/>
+              </a:ext>
+            </a:extLst>
+          </p:cNvPr>
+          <p:cNvSpPr/>
+          <p:nvPr/>
+        </p:nvSpPr>
+        <p:spPr>
+          <a:xfrm>
+            <a:off x="124495" y="116378"/>
+            <a:ext cx="6499006" cy="1364440"/>
+          </a:xfrm>
+          <a:prstGeom prst="roundRect">
+            <a:avLst/>
+          </a:prstGeom>
+          <a:solidFill>
+            <a:schemeClr val="tx1">
+              <a:lumMod val="85000"/>
+              <a:lumOff val="15000"/>
+              <a:alpha val="77000"/>
+            </a:schemeClr>
+          </a:solidFill>
+          <a:ln>
+            <a:noFill/>
+          </a:ln>
+        </p:spPr>
+        <p:style>
+          <a:lnRef idx="2">
+            <a:schemeClr val="dk1">
+              <a:shade val="15000"/>
+            </a:schemeClr>
+          </a:lnRef>
+          <a:fillRef idx="1">
+            <a:schemeClr val="dk1"/>
+          </a:fillRef>
+          <a:effectRef idx="0">
+            <a:schemeClr val="dk1"/>
+          </a:effectRef>
+          <a:fontRef idx="minor">
+            <a:schemeClr val="lt1"/>
+          </a:fontRef>
+        </p:style>
+        <p:txBody>
+          <a:bodyPr rtlCol="0" anchor="ctr"/>
+          <a:lstStyle/>
+          <a:p>
+            <a:pPr algn="ctr"/>
+            <a:endParaRPr lang="en-IN"/>
+          </a:p>
+        </p:txBody>
+      </p:sp>
+      <p:sp>
+        <p:nvSpPr>
+          <p:cNvPr id="21" name="Oval 20">
+            <a:extLst>
+              <a:ext uri="{FF2B5EF4-FFF2-40B4-BE49-F238E27FC236}">
+                <a16:creationId xmlns:a16="http://schemas.microsoft.com/office/drawing/2014/main" id="{ECC87B44-EFF1-4054-0B00-8DBBC026DD3E}"/>
+              </a:ext>
+            </a:extLst>
+          </p:cNvPr>
+          <p:cNvSpPr/>
+          <p:nvPr/>
+        </p:nvSpPr>
+        <p:spPr>
+          <a:xfrm>
+            <a:off x="5200950" y="435164"/>
+            <a:ext cx="705890" cy="779792"/>
+          </a:xfrm>
+          <a:prstGeom prst="ellipse">
+            <a:avLst/>
+          </a:prstGeom>
+          <a:solidFill>
+            <a:srgbClr val="0070C0"/>
+          </a:solidFill>
+          <a:ln>
+            <a:noFill/>
+          </a:ln>
+        </p:spPr>
+        <p:style>
+          <a:lnRef idx="2">
+            <a:schemeClr val="accent1">
+              <a:shade val="15000"/>
+            </a:schemeClr>
+          </a:lnRef>
+          <a:fillRef idx="1">
+            <a:schemeClr val="accent1"/>
+          </a:fillRef>
+          <a:effectRef idx="0">
+            <a:schemeClr val="accent1"/>
+          </a:effectRef>
+          <a:fontRef idx="minor">
+            <a:schemeClr val="lt1"/>
+          </a:fontRef>
+        </p:style>
+        <p:txBody>
+          <a:bodyPr rtlCol="0" anchor="ctr"/>
+          <a:lstStyle/>
+          <a:p>
+            <a:pPr algn="ctr"/>
+            <a:r>
+              <a:rPr lang="de-DE" sz="3200" dirty="0"/>
+              <a:t>Q</a:t>
+            </a:r>
+            <a:endParaRPr lang="en-IN" sz="3200" dirty="0"/>
+          </a:p>
+        </p:txBody>
+      </p:sp>
+      <p:grpSp>
+        <p:nvGrpSpPr>
+          <p:cNvPr id="70" name="Group 69">
+            <a:extLst>
+              <a:ext uri="{FF2B5EF4-FFF2-40B4-BE49-F238E27FC236}">
+                <a16:creationId xmlns:a16="http://schemas.microsoft.com/office/drawing/2014/main" id="{19413176-30C9-A5F9-AF18-5341D1ACE999}"/>
+              </a:ext>
+            </a:extLst>
+          </p:cNvPr>
+          <p:cNvGrpSpPr/>
+          <p:nvPr/>
+        </p:nvGrpSpPr>
+        <p:grpSpPr>
+          <a:xfrm>
+            <a:off x="1999657" y="461238"/>
+            <a:ext cx="705889" cy="727645"/>
+            <a:chOff x="1999657" y="435164"/>
+            <a:chExt cx="831273" cy="869250"/>
+          </a:xfrm>
+        </p:grpSpPr>
+        <p:sp>
+          <p:nvSpPr>
+            <p:cNvPr id="18" name="Oval 17">
+              <a:extLst>
+                <a:ext uri="{FF2B5EF4-FFF2-40B4-BE49-F238E27FC236}">
+                  <a16:creationId xmlns:a16="http://schemas.microsoft.com/office/drawing/2014/main" id="{7BD8BCC6-82C6-A98E-6E9E-930EB0B89A61}"/>
+                </a:ext>
+              </a:extLst>
+            </p:cNvPr>
+            <p:cNvSpPr/>
+            <p:nvPr/>
+          </p:nvSpPr>
+          <p:spPr>
+            <a:xfrm>
+              <a:off x="1999657" y="435164"/>
+              <a:ext cx="831273" cy="869250"/>
+            </a:xfrm>
+            <a:prstGeom prst="ellipse">
+              <a:avLst/>
+            </a:prstGeom>
+            <a:solidFill>
+              <a:schemeClr val="bg2">
+                <a:lumMod val="50000"/>
+              </a:schemeClr>
+            </a:solidFill>
+            <a:ln>
+              <a:noFill/>
+            </a:ln>
+          </p:spPr>
+          <p:style>
+            <a:lnRef idx="2">
+              <a:schemeClr val="accent1">
+                <a:shade val="15000"/>
+              </a:schemeClr>
+            </a:lnRef>
+            <a:fillRef idx="1">
+              <a:schemeClr val="accent1"/>
+            </a:fillRef>
+            <a:effectRef idx="0">
+              <a:schemeClr val="accent1"/>
+            </a:effectRef>
+            <a:fontRef idx="minor">
+              <a:schemeClr val="lt1"/>
+            </a:fontRef>
+          </p:style>
+          <p:txBody>
+            <a:bodyPr rtlCol="0" anchor="ctr"/>
+            <a:lstStyle/>
+            <a:p>
+              <a:pPr algn="ctr"/>
+              <a:endParaRPr lang="en-IN"/>
+            </a:p>
+          </p:txBody>
+        </p:sp>
+        <p:sp>
+          <p:nvSpPr>
+            <p:cNvPr id="22" name="Arrow: Right 21">
+              <a:extLst>
+                <a:ext uri="{FF2B5EF4-FFF2-40B4-BE49-F238E27FC236}">
+                  <a16:creationId xmlns:a16="http://schemas.microsoft.com/office/drawing/2014/main" id="{AFCF80CE-21F6-F0F2-1EDC-4F6C2B3D60D6}"/>
+                </a:ext>
+              </a:extLst>
+            </p:cNvPr>
+            <p:cNvSpPr/>
+            <p:nvPr/>
+          </p:nvSpPr>
+          <p:spPr>
+            <a:xfrm rot="16200000">
+              <a:off x="2023204" y="758425"/>
+              <a:ext cx="602989" cy="205778"/>
+            </a:xfrm>
+            <a:prstGeom prst="rightArrow">
+              <a:avLst>
+                <a:gd name="adj1" fmla="val 23835"/>
+                <a:gd name="adj2" fmla="val 50000"/>
+              </a:avLst>
+            </a:prstGeom>
+            <a:solidFill>
+              <a:schemeClr val="bg2">
+                <a:lumMod val="75000"/>
+              </a:schemeClr>
+            </a:solidFill>
+            <a:ln>
+              <a:noFill/>
+            </a:ln>
+          </p:spPr>
+          <p:style>
+            <a:lnRef idx="2">
+              <a:schemeClr val="accent1">
+                <a:shade val="15000"/>
+              </a:schemeClr>
+            </a:lnRef>
+            <a:fillRef idx="1">
+              <a:schemeClr val="accent1"/>
+            </a:fillRef>
+            <a:effectRef idx="0">
+              <a:schemeClr val="accent1"/>
+            </a:effectRef>
+            <a:fontRef idx="minor">
+              <a:schemeClr val="lt1"/>
+            </a:fontRef>
+          </p:style>
+          <p:txBody>
+            <a:bodyPr rtlCol="0" anchor="ctr"/>
+            <a:lstStyle/>
+            <a:p>
+              <a:pPr algn="ctr"/>
+              <a:endParaRPr lang="en-IN"/>
+            </a:p>
+          </p:txBody>
+        </p:sp>
+        <p:sp>
+          <p:nvSpPr>
+            <p:cNvPr id="25" name="Arrow: Right 24">
+              <a:extLst>
+                <a:ext uri="{FF2B5EF4-FFF2-40B4-BE49-F238E27FC236}">
+                  <a16:creationId xmlns:a16="http://schemas.microsoft.com/office/drawing/2014/main" id="{3142DED8-0485-1C6C-D45B-4141D6D4772E}"/>
+                </a:ext>
+              </a:extLst>
+            </p:cNvPr>
+            <p:cNvSpPr/>
+            <p:nvPr/>
+          </p:nvSpPr>
+          <p:spPr>
+            <a:xfrm rot="5400000">
+              <a:off x="2211992" y="793068"/>
+              <a:ext cx="602989" cy="205778"/>
+            </a:xfrm>
+            <a:prstGeom prst="rightArrow">
+              <a:avLst>
+                <a:gd name="adj1" fmla="val 28196"/>
+                <a:gd name="adj2" fmla="val 50000"/>
+              </a:avLst>
+            </a:prstGeom>
+            <a:solidFill>
+              <a:schemeClr val="bg2">
+                <a:lumMod val="75000"/>
+              </a:schemeClr>
+            </a:solidFill>
+            <a:ln>
+              <a:noFill/>
+            </a:ln>
+          </p:spPr>
+          <p:style>
+            <a:lnRef idx="2">
+              <a:schemeClr val="accent1">
+                <a:shade val="15000"/>
+              </a:schemeClr>
+            </a:lnRef>
+            <a:fillRef idx="1">
+              <a:schemeClr val="accent1"/>
+            </a:fillRef>
+            <a:effectRef idx="0">
+              <a:schemeClr val="accent1"/>
+            </a:effectRef>
+            <a:fontRef idx="minor">
+              <a:schemeClr val="lt1"/>
+            </a:fontRef>
+          </p:style>
+          <p:txBody>
+            <a:bodyPr rtlCol="0" anchor="ctr"/>
+            <a:lstStyle/>
+            <a:p>
+              <a:pPr algn="ctr"/>
+              <a:endParaRPr lang="en-IN"/>
+            </a:p>
+          </p:txBody>
+        </p:sp>
+      </p:grpSp>
+      <p:grpSp>
+        <p:nvGrpSpPr>
+          <p:cNvPr id="69" name="Group 68">
+            <a:extLst>
+              <a:ext uri="{FF2B5EF4-FFF2-40B4-BE49-F238E27FC236}">
+                <a16:creationId xmlns:a16="http://schemas.microsoft.com/office/drawing/2014/main" id="{D3261F3C-7927-B0D4-7DD8-C05972EE0CFC}"/>
+              </a:ext>
+            </a:extLst>
+          </p:cNvPr>
+          <p:cNvGrpSpPr/>
+          <p:nvPr/>
+        </p:nvGrpSpPr>
+        <p:grpSpPr>
+          <a:xfrm>
+            <a:off x="399011" y="461238"/>
+            <a:ext cx="705889" cy="727645"/>
+            <a:chOff x="399011" y="435164"/>
+            <a:chExt cx="831273" cy="869250"/>
+          </a:xfrm>
+        </p:grpSpPr>
+        <p:sp>
+          <p:nvSpPr>
+            <p:cNvPr id="17" name="Oval 16">
+              <a:extLst>
+                <a:ext uri="{FF2B5EF4-FFF2-40B4-BE49-F238E27FC236}">
+                  <a16:creationId xmlns:a16="http://schemas.microsoft.com/office/drawing/2014/main" id="{BB53493E-E770-6642-E6D8-1BF34C585799}"/>
+                </a:ext>
+              </a:extLst>
+            </p:cNvPr>
+            <p:cNvSpPr/>
+            <p:nvPr/>
+          </p:nvSpPr>
+          <p:spPr>
+            <a:xfrm>
+              <a:off x="399011" y="435164"/>
+              <a:ext cx="831273" cy="869250"/>
+            </a:xfrm>
+            <a:prstGeom prst="ellipse">
+              <a:avLst/>
+            </a:prstGeom>
+            <a:solidFill>
+              <a:schemeClr val="bg2">
+                <a:lumMod val="50000"/>
+              </a:schemeClr>
+            </a:solidFill>
+            <a:ln>
+              <a:noFill/>
+            </a:ln>
+          </p:spPr>
+          <p:style>
+            <a:lnRef idx="2">
+              <a:schemeClr val="accent1">
+                <a:shade val="15000"/>
+              </a:schemeClr>
+            </a:lnRef>
+            <a:fillRef idx="1">
+              <a:schemeClr val="accent1"/>
+            </a:fillRef>
+            <a:effectRef idx="0">
+              <a:schemeClr val="accent1"/>
+            </a:effectRef>
+            <a:fontRef idx="minor">
+              <a:schemeClr val="lt1"/>
+            </a:fontRef>
+          </p:style>
+          <p:txBody>
+            <a:bodyPr rtlCol="0" anchor="ctr"/>
+            <a:lstStyle/>
+            <a:p>
+              <a:pPr algn="ctr"/>
+              <a:endParaRPr lang="en-IN"/>
+            </a:p>
+          </p:txBody>
+        </p:sp>
+        <p:sp>
+          <p:nvSpPr>
+            <p:cNvPr id="28" name="Oval 27">
+              <a:extLst>
+                <a:ext uri="{FF2B5EF4-FFF2-40B4-BE49-F238E27FC236}">
+                  <a16:creationId xmlns:a16="http://schemas.microsoft.com/office/drawing/2014/main" id="{E13F6E2E-D5FA-6EB3-4042-E96AADA9B43B}"/>
+                </a:ext>
+              </a:extLst>
+            </p:cNvPr>
+            <p:cNvSpPr/>
+            <p:nvPr/>
+          </p:nvSpPr>
+          <p:spPr>
+            <a:xfrm>
+              <a:off x="746709" y="959004"/>
+              <a:ext cx="107361" cy="108407"/>
+            </a:xfrm>
+            <a:prstGeom prst="ellipse">
+              <a:avLst/>
+            </a:prstGeom>
+            <a:solidFill>
+              <a:schemeClr val="bg2">
+                <a:lumMod val="75000"/>
+              </a:schemeClr>
+            </a:solidFill>
+            <a:ln>
+              <a:noFill/>
+            </a:ln>
+          </p:spPr>
+          <p:style>
+            <a:lnRef idx="2">
+              <a:schemeClr val="accent1">
+                <a:shade val="15000"/>
+              </a:schemeClr>
+            </a:lnRef>
+            <a:fillRef idx="1">
+              <a:schemeClr val="accent1"/>
+            </a:fillRef>
+            <a:effectRef idx="0">
+              <a:schemeClr val="accent1"/>
+            </a:effectRef>
+            <a:fontRef idx="minor">
+              <a:schemeClr val="lt1"/>
+            </a:fontRef>
+          </p:style>
+          <p:txBody>
+            <a:bodyPr rtlCol="0" anchor="ctr"/>
+            <a:lstStyle/>
+            <a:p>
+              <a:pPr algn="ctr"/>
+              <a:endParaRPr lang="en-IN"/>
+            </a:p>
+          </p:txBody>
+        </p:sp>
+        <p:sp>
+          <p:nvSpPr>
+            <p:cNvPr id="29" name="Block Arc 28">
+              <a:extLst>
+                <a:ext uri="{FF2B5EF4-FFF2-40B4-BE49-F238E27FC236}">
+                  <a16:creationId xmlns:a16="http://schemas.microsoft.com/office/drawing/2014/main" id="{B6B93CDD-1A9F-41C8-0049-F1C8DF89C2FB}"/>
+                </a:ext>
+              </a:extLst>
+            </p:cNvPr>
+            <p:cNvSpPr/>
+            <p:nvPr/>
+          </p:nvSpPr>
+          <p:spPr>
+            <a:xfrm>
+              <a:off x="638706" y="826983"/>
+              <a:ext cx="323367" cy="264043"/>
             </a:xfrm>
             <a:prstGeom prst="blockArc">
               <a:avLst/>
             </a:prstGeom>
             <a:solidFill>
-              <a:schemeClr val="tx2">
-                <a:lumMod val="40000"/>
-                <a:lumOff val="60000"/>
-                <a:alpha val="64000"/>
+              <a:schemeClr val="bg2">
+                <a:lumMod val="75000"/>
               </a:schemeClr>
             </a:solidFill>
             <a:ln>
@@ -5568,10 +6373,10 @@
         </p:sp>
         <p:sp>
           <p:nvSpPr>
-            <p:cNvPr id="6" name="Block Arc 5">
+            <p:cNvPr id="30" name="Block Arc 29">
               <a:extLst>
                 <a:ext uri="{FF2B5EF4-FFF2-40B4-BE49-F238E27FC236}">
-                  <a16:creationId xmlns:a16="http://schemas.microsoft.com/office/drawing/2014/main" id="{2B909BEC-A2E0-5C9C-59D0-87208C751C98}"/>
+                  <a16:creationId xmlns:a16="http://schemas.microsoft.com/office/drawing/2014/main" id="{ADF5A482-B8E6-BA44-9C37-4E91851DFA17}"/>
                 </a:ext>
               </a:extLst>
             </p:cNvPr>
@@ -5580,16 +6385,15 @@
           </p:nvSpPr>
           <p:spPr>
             <a:xfrm>
-              <a:off x="2827273" y="6369768"/>
-              <a:ext cx="1203453" cy="966420"/>
+              <a:off x="576368" y="679955"/>
+              <a:ext cx="448043" cy="264043"/>
             </a:xfrm>
             <a:prstGeom prst="blockArc">
               <a:avLst/>
             </a:prstGeom>
             <a:solidFill>
               <a:schemeClr val="bg2">
-                <a:lumMod val="25000"/>
-                <a:alpha val="64000"/>
+                <a:lumMod val="75000"/>
               </a:schemeClr>
             </a:solidFill>
             <a:ln>
@@ -5625,12 +6429,33 @@
             </a:p>
           </p:txBody>
         </p:sp>
+      </p:grpSp>
+      <p:grpSp>
+        <p:nvGrpSpPr>
+          <p:cNvPr id="71" name="Group 70">
+            <a:extLst>
+              <a:ext uri="{FF2B5EF4-FFF2-40B4-BE49-F238E27FC236}">
+                <a16:creationId xmlns:a16="http://schemas.microsoft.com/office/drawing/2014/main" id="{1E1EC99C-5394-AAAD-EA92-2228FEC1E872}"/>
+              </a:ext>
+            </a:extLst>
+          </p:cNvPr>
+          <p:cNvGrpSpPr/>
+          <p:nvPr/>
+        </p:nvGrpSpPr>
+        <p:grpSpPr>
+          <a:xfrm>
+            <a:off x="3600304" y="435164"/>
+            <a:ext cx="705890" cy="779792"/>
+            <a:chOff x="3600303" y="435164"/>
+            <a:chExt cx="831273" cy="869250"/>
+          </a:xfrm>
+        </p:grpSpPr>
         <p:sp>
           <p:nvSpPr>
-            <p:cNvPr id="7" name="Oval 6">
+            <p:cNvPr id="19" name="Oval 18">
               <a:extLst>
                 <a:ext uri="{FF2B5EF4-FFF2-40B4-BE49-F238E27FC236}">
-                  <a16:creationId xmlns:a16="http://schemas.microsoft.com/office/drawing/2014/main" id="{CCB0B1AD-A871-17F2-EE26-1978A7CD32E7}"/>
+                  <a16:creationId xmlns:a16="http://schemas.microsoft.com/office/drawing/2014/main" id="{7C0F431A-F29D-1AE8-91AC-58F25EBC3B10}"/>
                 </a:ext>
               </a:extLst>
             </p:cNvPr>
@@ -5639,16 +6464,449 @@
           </p:nvSpPr>
           <p:spPr>
             <a:xfrm>
-              <a:off x="3196243" y="6733466"/>
-              <a:ext cx="465512" cy="532328"/>
+              <a:off x="3600303" y="435164"/>
+              <a:ext cx="831273" cy="869250"/>
             </a:xfrm>
             <a:prstGeom prst="ellipse">
               <a:avLst/>
             </a:prstGeom>
             <a:solidFill>
+              <a:srgbClr val="0070C0"/>
+            </a:solidFill>
+            <a:ln>
+              <a:noFill/>
+            </a:ln>
+          </p:spPr>
+          <p:style>
+            <a:lnRef idx="2">
+              <a:schemeClr val="accent1">
+                <a:shade val="15000"/>
+              </a:schemeClr>
+            </a:lnRef>
+            <a:fillRef idx="1">
+              <a:schemeClr val="accent1"/>
+            </a:fillRef>
+            <a:effectRef idx="0">
+              <a:schemeClr val="accent1"/>
+            </a:effectRef>
+            <a:fontRef idx="minor">
+              <a:schemeClr val="lt1"/>
+            </a:fontRef>
+          </p:style>
+          <p:txBody>
+            <a:bodyPr rtlCol="0" anchor="ctr"/>
+            <a:lstStyle/>
+            <a:p>
+              <a:pPr algn="ctr"/>
+              <a:endParaRPr lang="en-IN" sz="3200"/>
+            </a:p>
+          </p:txBody>
+        </p:sp>
+        <p:sp>
+          <p:nvSpPr>
+            <p:cNvPr id="65" name="Rectangle 64">
+              <a:extLst>
+                <a:ext uri="{FF2B5EF4-FFF2-40B4-BE49-F238E27FC236}">
+                  <a16:creationId xmlns:a16="http://schemas.microsoft.com/office/drawing/2014/main" id="{96694688-490A-A978-A8E2-BEE96378F6A1}"/>
+                </a:ext>
+              </a:extLst>
+            </p:cNvPr>
+            <p:cNvSpPr/>
+            <p:nvPr/>
+          </p:nvSpPr>
+          <p:spPr>
+            <a:xfrm>
+              <a:off x="3772099" y="830277"/>
+              <a:ext cx="487680" cy="108759"/>
+            </a:xfrm>
+            <a:prstGeom prst="rect">
+              <a:avLst/>
+            </a:prstGeom>
+            <a:solidFill>
+              <a:schemeClr val="bg2"/>
+            </a:solidFill>
+            <a:ln>
+              <a:noFill/>
+            </a:ln>
+          </p:spPr>
+          <p:style>
+            <a:lnRef idx="2">
+              <a:schemeClr val="accent1">
+                <a:shade val="15000"/>
+              </a:schemeClr>
+            </a:lnRef>
+            <a:fillRef idx="1">
+              <a:schemeClr val="accent1"/>
+            </a:fillRef>
+            <a:effectRef idx="0">
+              <a:schemeClr val="accent1"/>
+            </a:effectRef>
+            <a:fontRef idx="minor">
+              <a:schemeClr val="lt1"/>
+            </a:fontRef>
+          </p:style>
+          <p:txBody>
+            <a:bodyPr rtlCol="0" anchor="ctr"/>
+            <a:lstStyle/>
+            <a:p>
+              <a:pPr algn="ctr"/>
+              <a:endParaRPr lang="en-IN"/>
+            </a:p>
+          </p:txBody>
+        </p:sp>
+      </p:grpSp>
+      <p:sp>
+        <p:nvSpPr>
+          <p:cNvPr id="67" name="Trapezoid 66">
+            <a:extLst>
+              <a:ext uri="{FF2B5EF4-FFF2-40B4-BE49-F238E27FC236}">
+                <a16:creationId xmlns:a16="http://schemas.microsoft.com/office/drawing/2014/main" id="{EAEEDF79-2718-8CD0-A5D4-82C24978E5CB}"/>
+              </a:ext>
+            </a:extLst>
+          </p:cNvPr>
+          <p:cNvSpPr/>
+          <p:nvPr/>
+        </p:nvSpPr>
+        <p:spPr>
+          <a:xfrm>
+            <a:off x="1786942" y="7070267"/>
+            <a:ext cx="3236914" cy="1026329"/>
+          </a:xfrm>
+          <a:prstGeom prst="trapezoid">
+            <a:avLst/>
+          </a:prstGeom>
+          <a:solidFill>
+            <a:srgbClr val="462300"/>
+          </a:solidFill>
+          <a:ln>
+            <a:noFill/>
+          </a:ln>
+        </p:spPr>
+        <p:style>
+          <a:lnRef idx="2">
+            <a:schemeClr val="dk1">
+              <a:shade val="15000"/>
+            </a:schemeClr>
+          </a:lnRef>
+          <a:fillRef idx="1">
+            <a:schemeClr val="dk1"/>
+          </a:fillRef>
+          <a:effectRef idx="0">
+            <a:schemeClr val="dk1"/>
+          </a:effectRef>
+          <a:fontRef idx="minor">
+            <a:schemeClr val="lt1"/>
+          </a:fontRef>
+        </p:style>
+        <p:txBody>
+          <a:bodyPr rtlCol="0" anchor="ctr"/>
+          <a:lstStyle/>
+          <a:p>
+            <a:pPr algn="ctr"/>
+            <a:r>
+              <a:rPr lang="de-DE" sz="3600" dirty="0"/>
+              <a:t>Meeting</a:t>
+            </a:r>
+            <a:endParaRPr lang="en-IN" sz="3600" dirty="0"/>
+          </a:p>
+        </p:txBody>
+      </p:sp>
+      <p:sp>
+        <p:nvSpPr>
+          <p:cNvPr id="3" name="TextBox 2">
+            <a:extLst>
+              <a:ext uri="{FF2B5EF4-FFF2-40B4-BE49-F238E27FC236}">
+                <a16:creationId xmlns:a16="http://schemas.microsoft.com/office/drawing/2014/main" id="{197DC2D2-644E-4E7D-E858-A90F1A77D396}"/>
+              </a:ext>
+            </a:extLst>
+          </p:cNvPr>
+          <p:cNvSpPr txBox="1"/>
+          <p:nvPr/>
+        </p:nvSpPr>
+        <p:spPr>
+          <a:xfrm>
+            <a:off x="171697" y="1808618"/>
+            <a:ext cx="6451804" cy="1323439"/>
+          </a:xfrm>
+          <a:prstGeom prst="rect">
+            <a:avLst/>
+          </a:prstGeom>
+          <a:noFill/>
+          <a:ln w="63500">
+            <a:noFill/>
+          </a:ln>
+        </p:spPr>
+        <p:txBody>
+          <a:bodyPr wrap="square" rtlCol="0">
+            <a:spAutoFit/>
+          </a:bodyPr>
+          <a:lstStyle/>
+          <a:p>
+            <a:r>
+              <a:rPr lang="de-DE" sz="8000" dirty="0">
+                <a:solidFill>
+                  <a:srgbClr val="FFD369"/>
+                </a:solidFill>
+              </a:rPr>
+              <a:t>Temporary </a:t>
+            </a:r>
+            <a:r>
+              <a:rPr lang="de-DE" sz="6000" dirty="0">
+                <a:solidFill>
+                  <a:srgbClr val="0C7B93"/>
+                </a:solidFill>
+              </a:rPr>
+              <a:t>DND</a:t>
+            </a:r>
+          </a:p>
+        </p:txBody>
+      </p:sp>
+      <p:sp>
+        <p:nvSpPr>
+          <p:cNvPr id="10" name="Isosceles Triangle 9">
+            <a:extLst>
+              <a:ext uri="{FF2B5EF4-FFF2-40B4-BE49-F238E27FC236}">
+                <a16:creationId xmlns:a16="http://schemas.microsoft.com/office/drawing/2014/main" id="{47617B3F-80D3-79B5-33AA-C484E43164B0}"/>
+              </a:ext>
+            </a:extLst>
+          </p:cNvPr>
+          <p:cNvSpPr/>
+          <p:nvPr/>
+        </p:nvSpPr>
+        <p:spPr>
+          <a:xfrm rot="10800000">
+            <a:off x="1014436" y="6417425"/>
+            <a:ext cx="90464" cy="1098249"/>
+          </a:xfrm>
+          <a:prstGeom prst="triangle">
+            <a:avLst/>
+          </a:prstGeom>
+        </p:spPr>
+        <p:style>
+          <a:lnRef idx="2">
+            <a:schemeClr val="accent1">
+              <a:shade val="15000"/>
+            </a:schemeClr>
+          </a:lnRef>
+          <a:fillRef idx="1">
+            <a:schemeClr val="accent1"/>
+          </a:fillRef>
+          <a:effectRef idx="0">
+            <a:schemeClr val="accent1"/>
+          </a:effectRef>
+          <a:fontRef idx="minor">
+            <a:schemeClr val="lt1"/>
+          </a:fontRef>
+        </p:style>
+        <p:txBody>
+          <a:bodyPr rtlCol="0" anchor="ctr"/>
+          <a:lstStyle/>
+          <a:p>
+            <a:pPr algn="ctr"/>
+            <a:endParaRPr lang="en-IN"/>
+          </a:p>
+        </p:txBody>
+      </p:sp>
+      <p:sp>
+        <p:nvSpPr>
+          <p:cNvPr id="11" name="Isosceles Triangle 10">
+            <a:extLst>
+              <a:ext uri="{FF2B5EF4-FFF2-40B4-BE49-F238E27FC236}">
+                <a16:creationId xmlns:a16="http://schemas.microsoft.com/office/drawing/2014/main" id="{96614007-7525-297E-69F0-829DAE4AD1B4}"/>
+              </a:ext>
+            </a:extLst>
+          </p:cNvPr>
+          <p:cNvSpPr/>
+          <p:nvPr/>
+        </p:nvSpPr>
+        <p:spPr>
+          <a:xfrm rot="10800000">
+            <a:off x="5607983" y="6417425"/>
+            <a:ext cx="90464" cy="1098249"/>
+          </a:xfrm>
+          <a:prstGeom prst="triangle">
+            <a:avLst/>
+          </a:prstGeom>
+          <a:solidFill>
+            <a:srgbClr val="FF0000"/>
+          </a:solidFill>
+        </p:spPr>
+        <p:style>
+          <a:lnRef idx="2">
+            <a:schemeClr val="accent1">
+              <a:shade val="15000"/>
+            </a:schemeClr>
+          </a:lnRef>
+          <a:fillRef idx="1">
+            <a:schemeClr val="accent1"/>
+          </a:fillRef>
+          <a:effectRef idx="0">
+            <a:schemeClr val="accent1"/>
+          </a:effectRef>
+          <a:fontRef idx="minor">
+            <a:schemeClr val="lt1"/>
+          </a:fontRef>
+        </p:style>
+        <p:txBody>
+          <a:bodyPr rtlCol="0" anchor="ctr"/>
+          <a:lstStyle/>
+          <a:p>
+            <a:pPr algn="ctr"/>
+            <a:endParaRPr lang="en-IN"/>
+          </a:p>
+        </p:txBody>
+      </p:sp>
+      <p:grpSp>
+        <p:nvGrpSpPr>
+          <p:cNvPr id="64" name="Group 63">
+            <a:extLst>
+              <a:ext uri="{FF2B5EF4-FFF2-40B4-BE49-F238E27FC236}">
+                <a16:creationId xmlns:a16="http://schemas.microsoft.com/office/drawing/2014/main" id="{CDF63A0A-957E-A4A2-D423-E9BBA241E2E2}"/>
+              </a:ext>
+            </a:extLst>
+          </p:cNvPr>
+          <p:cNvGrpSpPr/>
+          <p:nvPr/>
+        </p:nvGrpSpPr>
+        <p:grpSpPr>
+          <a:xfrm>
+            <a:off x="2275671" y="6966549"/>
+            <a:ext cx="637977" cy="103718"/>
+            <a:chOff x="2275671" y="6966549"/>
+            <a:chExt cx="637977" cy="103718"/>
+          </a:xfrm>
+        </p:grpSpPr>
+        <p:sp>
+          <p:nvSpPr>
+            <p:cNvPr id="15" name="Rectangle 14">
+              <a:extLst>
+                <a:ext uri="{FF2B5EF4-FFF2-40B4-BE49-F238E27FC236}">
+                  <a16:creationId xmlns:a16="http://schemas.microsoft.com/office/drawing/2014/main" id="{29548BC5-71F1-B8E6-3A80-80BDB704E838}"/>
+                </a:ext>
+              </a:extLst>
+            </p:cNvPr>
+            <p:cNvSpPr/>
+            <p:nvPr/>
+          </p:nvSpPr>
+          <p:spPr>
+            <a:xfrm>
+              <a:off x="2275671" y="6966549"/>
+              <a:ext cx="637977" cy="103718"/>
+            </a:xfrm>
+            <a:prstGeom prst="rect">
+              <a:avLst/>
+            </a:prstGeom>
+            <a:solidFill>
+              <a:schemeClr val="bg2">
+                <a:lumMod val="50000"/>
+              </a:schemeClr>
+            </a:solidFill>
+            <a:ln>
+              <a:noFill/>
+            </a:ln>
+          </p:spPr>
+          <p:style>
+            <a:lnRef idx="2">
+              <a:schemeClr val="accent1">
+                <a:shade val="15000"/>
+              </a:schemeClr>
+            </a:lnRef>
+            <a:fillRef idx="1">
+              <a:schemeClr val="accent1"/>
+            </a:fillRef>
+            <a:effectRef idx="0">
+              <a:schemeClr val="accent1"/>
+            </a:effectRef>
+            <a:fontRef idx="minor">
+              <a:schemeClr val="lt1"/>
+            </a:fontRef>
+          </p:style>
+          <p:txBody>
+            <a:bodyPr rtlCol="0" anchor="ctr"/>
+            <a:lstStyle/>
+            <a:p>
+              <a:pPr algn="ctr"/>
+              <a:endParaRPr lang="en-IN"/>
+            </a:p>
+          </p:txBody>
+        </p:sp>
+        <p:sp>
+          <p:nvSpPr>
+            <p:cNvPr id="16" name="Rectangle 15">
+              <a:extLst>
+                <a:ext uri="{FF2B5EF4-FFF2-40B4-BE49-F238E27FC236}">
+                  <a16:creationId xmlns:a16="http://schemas.microsoft.com/office/drawing/2014/main" id="{E6F8CC7E-1654-A201-4AA4-BF8A73BDD7A3}"/>
+                </a:ext>
+              </a:extLst>
+            </p:cNvPr>
+            <p:cNvSpPr/>
+            <p:nvPr/>
+          </p:nvSpPr>
+          <p:spPr>
+            <a:xfrm>
+              <a:off x="2736026" y="6995549"/>
+              <a:ext cx="83374" cy="45719"/>
+            </a:xfrm>
+            <a:prstGeom prst="rect">
+              <a:avLst/>
+            </a:prstGeom>
+            <a:solidFill>
               <a:schemeClr val="tx2">
                 <a:lumMod val="50000"/>
-                <a:alpha val="64000"/>
+              </a:schemeClr>
+            </a:solidFill>
+            <a:ln>
+              <a:noFill/>
+            </a:ln>
+          </p:spPr>
+          <p:style>
+            <a:lnRef idx="2">
+              <a:schemeClr val="accent1">
+                <a:shade val="15000"/>
+              </a:schemeClr>
+            </a:lnRef>
+            <a:fillRef idx="1">
+              <a:schemeClr val="accent1"/>
+            </a:fillRef>
+            <a:effectRef idx="0">
+              <a:schemeClr val="accent1"/>
+            </a:effectRef>
+            <a:fontRef idx="minor">
+              <a:schemeClr val="lt1"/>
+            </a:fontRef>
+          </p:style>
+          <p:txBody>
+            <a:bodyPr rtlCol="0" anchor="ctr"/>
+            <a:lstStyle/>
+            <a:p>
+              <a:pPr algn="ctr"/>
+              <a:endParaRPr lang="en-IN"/>
+            </a:p>
+          </p:txBody>
+        </p:sp>
+        <p:sp>
+          <p:nvSpPr>
+            <p:cNvPr id="20" name="Rectangle 19">
+              <a:extLst>
+                <a:ext uri="{FF2B5EF4-FFF2-40B4-BE49-F238E27FC236}">
+                  <a16:creationId xmlns:a16="http://schemas.microsoft.com/office/drawing/2014/main" id="{E590E4EE-2E45-6E11-6F04-81DDB0D403E5}"/>
+                </a:ext>
+              </a:extLst>
+            </p:cNvPr>
+            <p:cNvSpPr/>
+            <p:nvPr/>
+          </p:nvSpPr>
+          <p:spPr>
+            <a:xfrm>
+              <a:off x="2621580" y="6994034"/>
+              <a:ext cx="83374" cy="45719"/>
+            </a:xfrm>
+            <a:prstGeom prst="rect">
+              <a:avLst/>
+            </a:prstGeom>
+            <a:solidFill>
+              <a:schemeClr val="tx2">
+                <a:lumMod val="50000"/>
               </a:schemeClr>
             </a:solidFill>
             <a:ln>
@@ -5683,10 +6941,10 @@
       </p:grpSp>
       <p:grpSp>
         <p:nvGrpSpPr>
-          <p:cNvPr id="13" name="Group 12">
+          <p:cNvPr id="66" name="Group 65">
             <a:extLst>
               <a:ext uri="{FF2B5EF4-FFF2-40B4-BE49-F238E27FC236}">
-                <a16:creationId xmlns:a16="http://schemas.microsoft.com/office/drawing/2014/main" id="{348DED0E-7B4C-1F48-B690-D543D0628770}"/>
+                <a16:creationId xmlns:a16="http://schemas.microsoft.com/office/drawing/2014/main" id="{B2C4E53E-FDC4-1EC5-D0D2-47B9C36A5A9C}"/>
               </a:ext>
             </a:extLst>
           </p:cNvPr>
@@ -5694,19 +6952,19 @@
           <p:nvPr/>
         </p:nvGrpSpPr>
         <p:grpSpPr>
-          <a:xfrm>
-            <a:off x="424868" y="5650566"/>
-            <a:ext cx="1779666" cy="1566842"/>
-            <a:chOff x="2539167" y="5769346"/>
-            <a:chExt cx="1779666" cy="1566842"/>
+          <a:xfrm rot="10800000">
+            <a:off x="3962942" y="6966549"/>
+            <a:ext cx="637977" cy="103718"/>
+            <a:chOff x="2275671" y="6966549"/>
+            <a:chExt cx="637977" cy="103718"/>
           </a:xfrm>
         </p:grpSpPr>
         <p:sp>
           <p:nvSpPr>
-            <p:cNvPr id="14" name="Block Arc 13">
+            <p:cNvPr id="68" name="Rectangle 67">
               <a:extLst>
                 <a:ext uri="{FF2B5EF4-FFF2-40B4-BE49-F238E27FC236}">
-                  <a16:creationId xmlns:a16="http://schemas.microsoft.com/office/drawing/2014/main" id="{A678E742-3515-9C1E-84D2-570A3928D899}"/>
+                  <a16:creationId xmlns:a16="http://schemas.microsoft.com/office/drawing/2014/main" id="{FE6B700C-240B-46F9-C0FE-FA6C6218F015}"/>
                 </a:ext>
               </a:extLst>
             </p:cNvPr>
@@ -5715,17 +6973,15 @@
           </p:nvSpPr>
           <p:spPr>
             <a:xfrm>
-              <a:off x="2539167" y="5769346"/>
-              <a:ext cx="1779666" cy="1230284"/>
+              <a:off x="2275671" y="6966549"/>
+              <a:ext cx="637977" cy="103718"/>
             </a:xfrm>
-            <a:prstGeom prst="blockArc">
+            <a:prstGeom prst="rect">
               <a:avLst/>
             </a:prstGeom>
             <a:solidFill>
-              <a:schemeClr val="tx2">
-                <a:lumMod val="40000"/>
-                <a:lumOff val="60000"/>
-                <a:alpha val="64000"/>
+              <a:schemeClr val="accent4">
+                <a:lumMod val="75000"/>
               </a:schemeClr>
             </a:solidFill>
             <a:ln>
@@ -5753,20 +7009,16 @@
             <a:lstStyle/>
             <a:p>
               <a:pPr algn="ctr"/>
-              <a:endParaRPr lang="en-IN">
-                <a:solidFill>
-                  <a:schemeClr val="tx1"/>
-                </a:solidFill>
-              </a:endParaRPr>
+              <a:endParaRPr lang="en-IN"/>
             </a:p>
           </p:txBody>
         </p:sp>
         <p:sp>
           <p:nvSpPr>
-            <p:cNvPr id="15" name="Block Arc 14">
+            <p:cNvPr id="72" name="Rectangle 71">
               <a:extLst>
                 <a:ext uri="{FF2B5EF4-FFF2-40B4-BE49-F238E27FC236}">
-                  <a16:creationId xmlns:a16="http://schemas.microsoft.com/office/drawing/2014/main" id="{E1539CEC-E6D7-6C8E-8315-97169C82EC2B}"/>
+                  <a16:creationId xmlns:a16="http://schemas.microsoft.com/office/drawing/2014/main" id="{120D2F6A-FA0F-531C-BB3D-0FED2B690503}"/>
                 </a:ext>
               </a:extLst>
             </p:cNvPr>
@@ -5775,16 +7027,15 @@
           </p:nvSpPr>
           <p:spPr>
             <a:xfrm>
-              <a:off x="2827273" y="6369768"/>
-              <a:ext cx="1203453" cy="966420"/>
+              <a:off x="2736026" y="6995549"/>
+              <a:ext cx="83374" cy="45719"/>
             </a:xfrm>
-            <a:prstGeom prst="blockArc">
+            <a:prstGeom prst="rect">
               <a:avLst/>
             </a:prstGeom>
             <a:solidFill>
-              <a:schemeClr val="bg2">
-                <a:lumMod val="25000"/>
-                <a:alpha val="64000"/>
+              <a:schemeClr val="tx2">
+                <a:lumMod val="50000"/>
               </a:schemeClr>
             </a:solidFill>
             <a:ln>
@@ -5812,20 +7063,16 @@
             <a:lstStyle/>
             <a:p>
               <a:pPr algn="ctr"/>
-              <a:endParaRPr lang="en-IN">
-                <a:solidFill>
-                  <a:schemeClr val="tx1"/>
-                </a:solidFill>
-              </a:endParaRPr>
+              <a:endParaRPr lang="en-IN"/>
             </a:p>
           </p:txBody>
         </p:sp>
         <p:sp>
           <p:nvSpPr>
-            <p:cNvPr id="17" name="Oval 16">
+            <p:cNvPr id="73" name="Rectangle 72">
               <a:extLst>
                 <a:ext uri="{FF2B5EF4-FFF2-40B4-BE49-F238E27FC236}">
-                  <a16:creationId xmlns:a16="http://schemas.microsoft.com/office/drawing/2014/main" id="{3969E863-64A7-F5AD-B60A-798B0BFDA9C5}"/>
+                  <a16:creationId xmlns:a16="http://schemas.microsoft.com/office/drawing/2014/main" id="{6E4A72B3-B426-4E17-B750-9FAC5634C02B}"/>
                 </a:ext>
               </a:extLst>
             </p:cNvPr>
@@ -5834,16 +7081,15 @@
           </p:nvSpPr>
           <p:spPr>
             <a:xfrm>
-              <a:off x="3196243" y="6733466"/>
-              <a:ext cx="465512" cy="532328"/>
+              <a:off x="2621580" y="6994034"/>
+              <a:ext cx="83374" cy="45719"/>
             </a:xfrm>
-            <a:prstGeom prst="ellipse">
+            <a:prstGeom prst="rect">
               <a:avLst/>
             </a:prstGeom>
             <a:solidFill>
               <a:schemeClr val="tx2">
                 <a:lumMod val="50000"/>
-                <a:alpha val="64000"/>
               </a:schemeClr>
             </a:solidFill>
             <a:ln>
@@ -5876,201 +7122,236 @@
           </p:txBody>
         </p:sp>
       </p:grpSp>
-      <p:grpSp>
-        <p:nvGrpSpPr>
-          <p:cNvPr id="18" name="Group 17">
+      <p:sp>
+        <p:nvSpPr>
+          <p:cNvPr id="23" name="TextBox 22">
             <a:extLst>
               <a:ext uri="{FF2B5EF4-FFF2-40B4-BE49-F238E27FC236}">
-                <a16:creationId xmlns:a16="http://schemas.microsoft.com/office/drawing/2014/main" id="{E400C265-7132-4DE4-C1B1-AA467C3E4C56}"/>
+                <a16:creationId xmlns:a16="http://schemas.microsoft.com/office/drawing/2014/main" id="{4995D397-DEAE-1EDA-9D16-EC958EB33ABE}"/>
               </a:ext>
             </a:extLst>
           </p:cNvPr>
-          <p:cNvGrpSpPr/>
+          <p:cNvSpPr txBox="1"/>
           <p:nvPr/>
-        </p:nvGrpSpPr>
-        <p:grpSpPr>
+        </p:nvSpPr>
+        <p:spPr>
           <a:xfrm>
-            <a:off x="4762432" y="5650566"/>
-            <a:ext cx="1779666" cy="1566842"/>
-            <a:chOff x="2539167" y="5769346"/>
-            <a:chExt cx="1779666" cy="1566842"/>
-          </a:xfrm>
-        </p:grpSpPr>
-        <p:sp>
-          <p:nvSpPr>
-            <p:cNvPr id="19" name="Block Arc 18">
-              <a:extLst>
-                <a:ext uri="{FF2B5EF4-FFF2-40B4-BE49-F238E27FC236}">
-                  <a16:creationId xmlns:a16="http://schemas.microsoft.com/office/drawing/2014/main" id="{64783DEC-55E4-F6ED-9035-744294362932}"/>
-                </a:ext>
-              </a:extLst>
-            </p:cNvPr>
-            <p:cNvSpPr/>
-            <p:nvPr/>
-          </p:nvSpPr>
-          <p:spPr>
-            <a:xfrm>
-              <a:off x="2539167" y="5769346"/>
-              <a:ext cx="1779666" cy="1230284"/>
-            </a:xfrm>
-            <a:prstGeom prst="blockArc">
-              <a:avLst/>
-            </a:prstGeom>
-            <a:solidFill>
-              <a:schemeClr val="tx2">
-                <a:lumMod val="40000"/>
-                <a:lumOff val="60000"/>
-                <a:alpha val="64000"/>
-              </a:schemeClr>
-            </a:solidFill>
-            <a:ln>
-              <a:noFill/>
-            </a:ln>
-          </p:spPr>
-          <p:style>
-            <a:lnRef idx="2">
-              <a:schemeClr val="accent1">
-                <a:shade val="15000"/>
-              </a:schemeClr>
-            </a:lnRef>
-            <a:fillRef idx="1">
-              <a:schemeClr val="accent1"/>
-            </a:fillRef>
-            <a:effectRef idx="0">
-              <a:schemeClr val="accent1"/>
-            </a:effectRef>
-            <a:fontRef idx="minor">
-              <a:schemeClr val="lt1"/>
-            </a:fontRef>
-          </p:style>
-          <p:txBody>
-            <a:bodyPr rtlCol="0" anchor="ctr"/>
-            <a:lstStyle/>
-            <a:p>
-              <a:pPr algn="ctr"/>
-              <a:endParaRPr lang="en-IN">
+            <a:off x="557277" y="11078697"/>
+            <a:ext cx="5743446" cy="830997"/>
+          </a:xfrm>
+          <a:prstGeom prst="rect">
+            <a:avLst/>
+          </a:prstGeom>
+          <a:noFill/>
+        </p:spPr>
+        <p:txBody>
+          <a:bodyPr wrap="square" rtlCol="0">
+            <a:spAutoFit/>
+          </a:bodyPr>
+          <a:lstStyle/>
+          <a:p>
+            <a:pPr algn="ctr"/>
+            <a:r>
+              <a:rPr lang="de-DE" sz="4800" dirty="0">
                 <a:solidFill>
-                  <a:schemeClr val="tx1"/>
+                  <a:schemeClr val="accent4">
+                    <a:lumMod val="75000"/>
+                    <a:alpha val="33000"/>
+                  </a:schemeClr>
                 </a:solidFill>
-              </a:endParaRPr>
-            </a:p>
-          </p:txBody>
-        </p:sp>
-        <p:sp>
-          <p:nvSpPr>
-            <p:cNvPr id="21" name="Block Arc 20">
-              <a:extLst>
-                <a:ext uri="{FF2B5EF4-FFF2-40B4-BE49-F238E27FC236}">
-                  <a16:creationId xmlns:a16="http://schemas.microsoft.com/office/drawing/2014/main" id="{F182E8A0-E819-B662-76B7-B9663A19888F}"/>
-                </a:ext>
-              </a:extLst>
-            </p:cNvPr>
-            <p:cNvSpPr/>
-            <p:nvPr/>
-          </p:nvSpPr>
-          <p:spPr>
-            <a:xfrm>
-              <a:off x="2827273" y="6369768"/>
-              <a:ext cx="1203453" cy="966420"/>
-            </a:xfrm>
-            <a:prstGeom prst="blockArc">
-              <a:avLst/>
-            </a:prstGeom>
-            <a:solidFill>
-              <a:schemeClr val="bg2">
-                <a:lumMod val="25000"/>
-                <a:alpha val="64000"/>
-              </a:schemeClr>
-            </a:solidFill>
-            <a:ln>
-              <a:noFill/>
-            </a:ln>
-          </p:spPr>
-          <p:style>
-            <a:lnRef idx="2">
-              <a:schemeClr val="accent1">
-                <a:shade val="15000"/>
-              </a:schemeClr>
-            </a:lnRef>
-            <a:fillRef idx="1">
-              <a:schemeClr val="accent1"/>
-            </a:fillRef>
-            <a:effectRef idx="0">
-              <a:schemeClr val="accent1"/>
-            </a:effectRef>
-            <a:fontRef idx="minor">
-              <a:schemeClr val="lt1"/>
-            </a:fontRef>
-          </p:style>
-          <p:txBody>
-            <a:bodyPr rtlCol="0" anchor="ctr"/>
-            <a:lstStyle/>
-            <a:p>
-              <a:pPr algn="ctr"/>
-              <a:endParaRPr lang="en-IN">
+              </a:rPr>
+              <a:t>Quiet</a:t>
+            </a:r>
+            <a:r>
+              <a:rPr lang="de-DE" sz="4800" dirty="0">
                 <a:solidFill>
-                  <a:schemeClr val="tx1"/>
+                  <a:srgbClr val="FFD369">
+                    <a:alpha val="33000"/>
+                  </a:srgbClr>
                 </a:solidFill>
-              </a:endParaRPr>
-            </a:p>
-          </p:txBody>
-        </p:sp>
-        <p:sp>
-          <p:nvSpPr>
-            <p:cNvPr id="27" name="Oval 26">
-              <a:extLst>
-                <a:ext uri="{FF2B5EF4-FFF2-40B4-BE49-F238E27FC236}">
-                  <a16:creationId xmlns:a16="http://schemas.microsoft.com/office/drawing/2014/main" id="{A3E0D44F-56B2-F104-4396-43AE283349DF}"/>
-                </a:ext>
-              </a:extLst>
-            </p:cNvPr>
-            <p:cNvSpPr/>
-            <p:nvPr/>
-          </p:nvSpPr>
-          <p:spPr>
-            <a:xfrm>
-              <a:off x="3196243" y="6733466"/>
-              <a:ext cx="465512" cy="532328"/>
-            </a:xfrm>
-            <a:prstGeom prst="ellipse">
-              <a:avLst/>
-            </a:prstGeom>
-            <a:solidFill>
-              <a:schemeClr val="tx2">
-                <a:lumMod val="50000"/>
-                <a:alpha val="64000"/>
-              </a:schemeClr>
-            </a:solidFill>
-            <a:ln>
-              <a:noFill/>
-            </a:ln>
-          </p:spPr>
-          <p:style>
-            <a:lnRef idx="2">
-              <a:schemeClr val="accent1">
-                <a:shade val="15000"/>
-              </a:schemeClr>
-            </a:lnRef>
-            <a:fillRef idx="1">
-              <a:schemeClr val="accent1"/>
-            </a:fillRef>
-            <a:effectRef idx="0">
-              <a:schemeClr val="accent1"/>
-            </a:effectRef>
-            <a:fontRef idx="minor">
-              <a:schemeClr val="lt1"/>
-            </a:fontRef>
-          </p:style>
-          <p:txBody>
-            <a:bodyPr rtlCol="0" anchor="ctr"/>
-            <a:lstStyle/>
-            <a:p>
-              <a:pPr algn="ctr"/>
-              <a:endParaRPr lang="en-IN"/>
-            </a:p>
-          </p:txBody>
-        </p:sp>
-      </p:grpSp>
+              </a:rPr>
+              <a:t> </a:t>
+            </a:r>
+            <a:r>
+              <a:rPr lang="de-DE" sz="4800" dirty="0">
+                <a:solidFill>
+                  <a:srgbClr val="0C7B93">
+                    <a:alpha val="33000"/>
+                  </a:srgbClr>
+                </a:solidFill>
+              </a:rPr>
+              <a:t>Exceptional</a:t>
+            </a:r>
+            <a:endParaRPr lang="en-IN" sz="4800" dirty="0">
+              <a:solidFill>
+                <a:schemeClr val="accent2">
+                  <a:lumMod val="50000"/>
+                  <a:alpha val="33000"/>
+                </a:schemeClr>
+              </a:solidFill>
+            </a:endParaRPr>
+          </a:p>
+        </p:txBody>
+      </p:sp>
+    </p:spTree>
+    <p:extLst>
+      <p:ext uri="{BB962C8B-B14F-4D97-AF65-F5344CB8AC3E}">
+        <p14:creationId xmlns:p14="http://schemas.microsoft.com/office/powerpoint/2010/main" val="3865759010"/>
+      </p:ext>
+    </p:extLst>
+  </p:cSld>
+  <p:clrMapOvr>
+    <a:masterClrMapping/>
+  </p:clrMapOvr>
+</p:sld>
+</file>
+
+<file path=ppt/slides/slide7.xml><?xml version="1.0" encoding="utf-8"?>
+<p:sld xmlns:a="http://schemas.openxmlformats.org/drawingml/2006/main" xmlns:r="http://schemas.openxmlformats.org/officeDocument/2006/relationships" xmlns:p="http://schemas.openxmlformats.org/presentationml/2006/main">
+  <p:cSld>
+    <p:spTree>
+      <p:nvGrpSpPr>
+        <p:cNvPr id="1" name=""/>
+        <p:cNvGrpSpPr/>
+        <p:nvPr/>
+      </p:nvGrpSpPr>
+      <p:grpSpPr>
+        <a:xfrm>
+          <a:off x="0" y="0"/>
+          <a:ext cx="0" cy="0"/>
+          <a:chOff x="0" y="0"/>
+          <a:chExt cx="0" cy="0"/>
+        </a:xfrm>
+      </p:grpSpPr>
+      <p:sp>
+        <p:nvSpPr>
+          <p:cNvPr id="3" name="TextBox 2">
+            <a:extLst>
+              <a:ext uri="{FF2B5EF4-FFF2-40B4-BE49-F238E27FC236}">
+                <a16:creationId xmlns:a16="http://schemas.microsoft.com/office/drawing/2014/main" id="{197DC2D2-644E-4E7D-E858-A90F1A77D396}"/>
+              </a:ext>
+            </a:extLst>
+          </p:cNvPr>
+          <p:cNvSpPr txBox="1"/>
+          <p:nvPr/>
+        </p:nvSpPr>
+        <p:spPr>
+          <a:xfrm>
+            <a:off x="-435081" y="1095884"/>
+            <a:ext cx="7680960" cy="3939540"/>
+          </a:xfrm>
+          <a:prstGeom prst="rect">
+            <a:avLst/>
+          </a:prstGeom>
+          <a:noFill/>
+          <a:ln w="63500">
+            <a:noFill/>
+          </a:ln>
+        </p:spPr>
+        <p:txBody>
+          <a:bodyPr wrap="square" rtlCol="0">
+            <a:spAutoFit/>
+          </a:bodyPr>
+          <a:lstStyle/>
+          <a:p>
+            <a:pPr algn="ctr"/>
+            <a:r>
+              <a:rPr lang="de-DE" sz="10000" dirty="0">
+                <a:solidFill>
+                  <a:srgbClr val="FFD369"/>
+                </a:solidFill>
+              </a:rPr>
+              <a:t>Maximum</a:t>
+            </a:r>
+          </a:p>
+          <a:p>
+            <a:pPr algn="ctr"/>
+            <a:r>
+              <a:rPr lang="de-DE" sz="15000" dirty="0">
+                <a:solidFill>
+                  <a:srgbClr val="0C7B93"/>
+                </a:solidFill>
+              </a:rPr>
+              <a:t>Privacy</a:t>
+            </a:r>
+            <a:endParaRPr lang="de-DE" sz="15000" dirty="0">
+              <a:solidFill>
+                <a:srgbClr val="800000"/>
+              </a:solidFill>
+            </a:endParaRPr>
+          </a:p>
+        </p:txBody>
+      </p:sp>
+      <p:sp>
+        <p:nvSpPr>
+          <p:cNvPr id="4" name="TextBox 3">
+            <a:extLst>
+              <a:ext uri="{FF2B5EF4-FFF2-40B4-BE49-F238E27FC236}">
+                <a16:creationId xmlns:a16="http://schemas.microsoft.com/office/drawing/2014/main" id="{7C5DF3D4-E1D0-9F44-16F0-5B3B0A402E2C}"/>
+              </a:ext>
+            </a:extLst>
+          </p:cNvPr>
+          <p:cNvSpPr txBox="1"/>
+          <p:nvPr/>
+        </p:nvSpPr>
+        <p:spPr>
+          <a:xfrm>
+            <a:off x="124495" y="8492188"/>
+            <a:ext cx="6561808" cy="3170099"/>
+          </a:xfrm>
+          <a:prstGeom prst="rect">
+            <a:avLst/>
+          </a:prstGeom>
+          <a:noFill/>
+        </p:spPr>
+        <p:txBody>
+          <a:bodyPr wrap="square" rtlCol="0">
+            <a:spAutoFit/>
+          </a:bodyPr>
+          <a:lstStyle/>
+          <a:p>
+            <a:pPr algn="r"/>
+            <a:r>
+              <a:rPr lang="de-DE" sz="4000" dirty="0">
+                <a:solidFill>
+                  <a:schemeClr val="bg2">
+                    <a:lumMod val="10000"/>
+                  </a:schemeClr>
+                </a:solidFill>
+              </a:rPr>
+              <a:t>No Data User Data leaves the Device without active user action.</a:t>
+            </a:r>
+          </a:p>
+          <a:p>
+            <a:pPr algn="r"/>
+            <a:endParaRPr lang="de-DE" sz="4000" dirty="0">
+              <a:solidFill>
+                <a:schemeClr val="accent2">
+                  <a:lumMod val="50000"/>
+                </a:schemeClr>
+              </a:solidFill>
+            </a:endParaRPr>
+          </a:p>
+          <a:p>
+            <a:pPr algn="r"/>
+            <a:r>
+              <a:rPr lang="de-DE" sz="4000" dirty="0">
+                <a:solidFill>
+                  <a:schemeClr val="accent2">
+                    <a:lumMod val="50000"/>
+                  </a:schemeClr>
+                </a:solidFill>
+              </a:rPr>
+              <a:t>No Internet Required.</a:t>
+            </a:r>
+            <a:endParaRPr lang="en-IN" sz="4000" dirty="0">
+              <a:solidFill>
+                <a:srgbClr val="800000"/>
+              </a:solidFill>
+            </a:endParaRPr>
+          </a:p>
+        </p:txBody>
+      </p:sp>
       <p:grpSp>
         <p:nvGrpSpPr>
           <p:cNvPr id="36" name="Group 35">
@@ -6112,7 +7393,7 @@
               <a:avLst/>
             </a:prstGeom>
             <a:solidFill>
-              <a:srgbClr val="002060"/>
+              <a:srgbClr val="0C0C1E"/>
             </a:solidFill>
             <a:ln>
               <a:noFill/>
@@ -6300,141 +7581,355 @@
           </p:txBody>
         </p:sp>
       </p:grpSp>
-      <p:cxnSp>
-        <p:nvCxnSpPr>
-          <p:cNvPr id="9" name="Straight Connector 8">
+      <p:sp>
+        <p:nvSpPr>
+          <p:cNvPr id="2" name="Flowchart: Delay 1">
             <a:extLst>
               <a:ext uri="{FF2B5EF4-FFF2-40B4-BE49-F238E27FC236}">
-                <a16:creationId xmlns:a16="http://schemas.microsoft.com/office/drawing/2014/main" id="{C6D629FB-57F8-6EE2-43BB-1D85BD95564B}"/>
+                <a16:creationId xmlns:a16="http://schemas.microsoft.com/office/drawing/2014/main" id="{CF0443F4-9B2E-6979-0763-B9679767F9B2}"/>
               </a:ext>
             </a:extLst>
           </p:cNvPr>
-          <p:cNvCxnSpPr>
-            <a:cxnSpLocks/>
-          </p:cNvCxnSpPr>
+          <p:cNvSpPr/>
           <p:nvPr/>
-        </p:nvCxnSpPr>
+        </p:nvSpPr>
         <p:spPr>
-          <a:xfrm>
-            <a:off x="510570" y="5533079"/>
-            <a:ext cx="1612981" cy="1613935"/>
-          </a:xfrm>
-          <a:prstGeom prst="line">
+          <a:xfrm rot="5400000">
+            <a:off x="2487635" y="5715993"/>
+            <a:ext cx="1835526" cy="1532361"/>
+          </a:xfrm>
+          <a:prstGeom prst="flowChartDelay">
             <a:avLst/>
           </a:prstGeom>
-          <a:ln w="190500">
-            <a:solidFill>
-              <a:srgbClr val="640000">
-                <a:alpha val="68000"/>
-              </a:srgbClr>
-            </a:solidFill>
-          </a:ln>
+          <a:noFill/>
+          <a:ln w="63500"/>
         </p:spPr>
         <p:style>
-          <a:lnRef idx="1">
-            <a:schemeClr val="accent1"/>
+          <a:lnRef idx="2">
+            <a:schemeClr val="accent1">
+              <a:shade val="15000"/>
+            </a:schemeClr>
           </a:lnRef>
-          <a:fillRef idx="0">
+          <a:fillRef idx="1">
             <a:schemeClr val="accent1"/>
           </a:fillRef>
           <a:effectRef idx="0">
             <a:schemeClr val="accent1"/>
           </a:effectRef>
           <a:fontRef idx="minor">
-            <a:schemeClr val="tx1"/>
+            <a:schemeClr val="lt1"/>
           </a:fontRef>
         </p:style>
-      </p:cxnSp>
-      <p:cxnSp>
-        <p:nvCxnSpPr>
-          <p:cNvPr id="16" name="Straight Connector 15">
+        <p:txBody>
+          <a:bodyPr rtlCol="0" anchor="ctr"/>
+          <a:lstStyle/>
+          <a:p>
+            <a:pPr algn="ctr"/>
+            <a:endParaRPr lang="en-IN"/>
+          </a:p>
+        </p:txBody>
+      </p:sp>
+      <p:sp>
+        <p:nvSpPr>
+          <p:cNvPr id="9" name="Flowchart: Delay 8">
             <a:extLst>
               <a:ext uri="{FF2B5EF4-FFF2-40B4-BE49-F238E27FC236}">
-                <a16:creationId xmlns:a16="http://schemas.microsoft.com/office/drawing/2014/main" id="{5CBB912C-CD40-0505-3292-11E52EFAE6C6}"/>
+                <a16:creationId xmlns:a16="http://schemas.microsoft.com/office/drawing/2014/main" id="{C0AAA785-2378-A4F8-EEF5-B7AD88BA49FB}"/>
               </a:ext>
             </a:extLst>
           </p:cNvPr>
-          <p:cNvCxnSpPr>
-            <a:cxnSpLocks/>
-          </p:cNvCxnSpPr>
+          <p:cNvSpPr/>
           <p:nvPr/>
-        </p:nvCxnSpPr>
+        </p:nvSpPr>
         <p:spPr>
-          <a:xfrm>
-            <a:off x="2634612" y="4917937"/>
-            <a:ext cx="1612981" cy="1613935"/>
-          </a:xfrm>
-          <a:prstGeom prst="line">
+          <a:xfrm rot="5400000">
+            <a:off x="2677230" y="5852866"/>
+            <a:ext cx="1456335" cy="1258613"/>
+          </a:xfrm>
+          <a:prstGeom prst="flowChartDelay">
             <a:avLst/>
           </a:prstGeom>
-          <a:ln w="190500">
-            <a:solidFill>
-              <a:srgbClr val="640000">
-                <a:alpha val="68000"/>
-              </a:srgbClr>
-            </a:solidFill>
-          </a:ln>
+          <a:noFill/>
+          <a:ln w="63500"/>
         </p:spPr>
         <p:style>
-          <a:lnRef idx="1">
-            <a:schemeClr val="accent1"/>
+          <a:lnRef idx="2">
+            <a:schemeClr val="accent1">
+              <a:shade val="15000"/>
+            </a:schemeClr>
           </a:lnRef>
-          <a:fillRef idx="0">
+          <a:fillRef idx="1">
             <a:schemeClr val="accent1"/>
           </a:fillRef>
           <a:effectRef idx="0">
             <a:schemeClr val="accent1"/>
           </a:effectRef>
           <a:fontRef idx="minor">
-            <a:schemeClr val="tx1"/>
+            <a:schemeClr val="lt1"/>
           </a:fontRef>
         </p:style>
-      </p:cxnSp>
-      <p:cxnSp>
-        <p:nvCxnSpPr>
-          <p:cNvPr id="20" name="Straight Connector 19">
+        <p:txBody>
+          <a:bodyPr rtlCol="0" anchor="ctr"/>
+          <a:lstStyle/>
+          <a:p>
+            <a:pPr algn="ctr"/>
+            <a:endParaRPr lang="en-IN"/>
+          </a:p>
+        </p:txBody>
+      </p:sp>
+      <p:grpSp>
+        <p:nvGrpSpPr>
+          <p:cNvPr id="12" name="Group 11">
             <a:extLst>
               <a:ext uri="{FF2B5EF4-FFF2-40B4-BE49-F238E27FC236}">
-                <a16:creationId xmlns:a16="http://schemas.microsoft.com/office/drawing/2014/main" id="{6EC7389F-FD61-82C0-BEE0-F1EA335A25E6}"/>
+                <a16:creationId xmlns:a16="http://schemas.microsoft.com/office/drawing/2014/main" id="{F5D26BCF-F00D-EF32-2FA6-3B7F0BB54FD5}"/>
               </a:ext>
             </a:extLst>
           </p:cNvPr>
-          <p:cNvCxnSpPr>
-            <a:cxnSpLocks/>
-          </p:cNvCxnSpPr>
+          <p:cNvGrpSpPr/>
           <p:nvPr/>
-        </p:nvCxnSpPr>
+        </p:nvGrpSpPr>
+        <p:grpSpPr>
+          <a:xfrm>
+            <a:off x="3220406" y="6451692"/>
+            <a:ext cx="369982" cy="474075"/>
+            <a:chOff x="737458" y="5754005"/>
+            <a:chExt cx="619891" cy="656420"/>
+          </a:xfrm>
+          <a:solidFill>
+            <a:schemeClr val="bg2">
+              <a:lumMod val="10000"/>
+            </a:schemeClr>
+          </a:solidFill>
+        </p:grpSpPr>
+        <p:sp>
+          <p:nvSpPr>
+            <p:cNvPr id="11" name="Isosceles Triangle 10">
+              <a:extLst>
+                <a:ext uri="{FF2B5EF4-FFF2-40B4-BE49-F238E27FC236}">
+                  <a16:creationId xmlns:a16="http://schemas.microsoft.com/office/drawing/2014/main" id="{059F4D51-57C0-F686-8B2F-5B33039D0AAF}"/>
+                </a:ext>
+              </a:extLst>
+            </p:cNvPr>
+            <p:cNvSpPr/>
+            <p:nvPr/>
+          </p:nvSpPr>
+          <p:spPr>
+            <a:xfrm>
+              <a:off x="737458" y="5925002"/>
+              <a:ext cx="619891" cy="485423"/>
+            </a:xfrm>
+            <a:prstGeom prst="triangle">
+              <a:avLst/>
+            </a:prstGeom>
+            <a:grpFill/>
+            <a:ln>
+              <a:noFill/>
+            </a:ln>
+          </p:spPr>
+          <p:style>
+            <a:lnRef idx="2">
+              <a:schemeClr val="accent1">
+                <a:shade val="15000"/>
+              </a:schemeClr>
+            </a:lnRef>
+            <a:fillRef idx="1">
+              <a:schemeClr val="accent1"/>
+            </a:fillRef>
+            <a:effectRef idx="0">
+              <a:schemeClr val="accent1"/>
+            </a:effectRef>
+            <a:fontRef idx="minor">
+              <a:schemeClr val="lt1"/>
+            </a:fontRef>
+          </p:style>
+          <p:txBody>
+            <a:bodyPr rtlCol="0" anchor="ctr"/>
+            <a:lstStyle/>
+            <a:p>
+              <a:pPr algn="ctr"/>
+              <a:endParaRPr lang="en-IN"/>
+            </a:p>
+          </p:txBody>
+        </p:sp>
+        <p:sp>
+          <p:nvSpPr>
+            <p:cNvPr id="10" name="Oval 9">
+              <a:extLst>
+                <a:ext uri="{FF2B5EF4-FFF2-40B4-BE49-F238E27FC236}">
+                  <a16:creationId xmlns:a16="http://schemas.microsoft.com/office/drawing/2014/main" id="{6CD40E9E-4041-9888-9F8B-5CFED88C8385}"/>
+                </a:ext>
+              </a:extLst>
+            </p:cNvPr>
+            <p:cNvSpPr/>
+            <p:nvPr/>
+          </p:nvSpPr>
+          <p:spPr>
+            <a:xfrm>
+              <a:off x="864524" y="5754005"/>
+              <a:ext cx="365760" cy="341995"/>
+            </a:xfrm>
+            <a:prstGeom prst="ellipse">
+              <a:avLst/>
+            </a:prstGeom>
+            <a:grpFill/>
+            <a:ln>
+              <a:noFill/>
+            </a:ln>
+          </p:spPr>
+          <p:style>
+            <a:lnRef idx="2">
+              <a:schemeClr val="accent1">
+                <a:shade val="15000"/>
+              </a:schemeClr>
+            </a:lnRef>
+            <a:fillRef idx="1">
+              <a:schemeClr val="accent1"/>
+            </a:fillRef>
+            <a:effectRef idx="0">
+              <a:schemeClr val="accent1"/>
+            </a:effectRef>
+            <a:fontRef idx="minor">
+              <a:schemeClr val="lt1"/>
+            </a:fontRef>
+          </p:style>
+          <p:txBody>
+            <a:bodyPr rtlCol="0" anchor="ctr"/>
+            <a:lstStyle/>
+            <a:p>
+              <a:pPr algn="ctr"/>
+              <a:endParaRPr lang="en-IN"/>
+            </a:p>
+          </p:txBody>
+        </p:sp>
+      </p:grpSp>
+      <p:sp>
+        <p:nvSpPr>
+          <p:cNvPr id="20" name="Block Arc 19">
+            <a:extLst>
+              <a:ext uri="{FF2B5EF4-FFF2-40B4-BE49-F238E27FC236}">
+                <a16:creationId xmlns:a16="http://schemas.microsoft.com/office/drawing/2014/main" id="{74D45575-9F90-C438-4D08-F3FE64039DE5}"/>
+              </a:ext>
+            </a:extLst>
+          </p:cNvPr>
+          <p:cNvSpPr/>
+          <p:nvPr/>
+        </p:nvSpPr>
         <p:spPr>
           <a:xfrm>
-            <a:off x="4653468" y="5399122"/>
-            <a:ext cx="1612981" cy="1613935"/>
-          </a:xfrm>
-          <a:prstGeom prst="line">
-            <a:avLst/>
+            <a:off x="2601565" y="4874499"/>
+            <a:ext cx="1607663" cy="1341120"/>
+          </a:xfrm>
+          <a:prstGeom prst="blockArc">
+            <a:avLst>
+              <a:gd name="adj1" fmla="val 10905079"/>
+              <a:gd name="adj2" fmla="val 21463205"/>
+              <a:gd name="adj3" fmla="val 11313"/>
+            </a:avLst>
           </a:prstGeom>
-          <a:ln w="190500">
-            <a:solidFill>
-              <a:srgbClr val="640000">
-                <a:alpha val="68000"/>
-              </a:srgbClr>
-            </a:solidFill>
-          </a:ln>
+          <a:noFill/>
+          <a:ln w="63500"/>
         </p:spPr>
         <p:style>
-          <a:lnRef idx="1">
-            <a:schemeClr val="accent1"/>
+          <a:lnRef idx="2">
+            <a:schemeClr val="accent1">
+              <a:shade val="15000"/>
+            </a:schemeClr>
           </a:lnRef>
-          <a:fillRef idx="0">
+          <a:fillRef idx="1">
             <a:schemeClr val="accent1"/>
           </a:fillRef>
           <a:effectRef idx="0">
             <a:schemeClr val="accent1"/>
           </a:effectRef>
           <a:fontRef idx="minor">
-            <a:schemeClr val="tx1"/>
+            <a:schemeClr val="lt1"/>
           </a:fontRef>
         </p:style>
-      </p:cxnSp>
+        <p:txBody>
+          <a:bodyPr rtlCol="0" anchor="ctr"/>
+          <a:lstStyle/>
+          <a:p>
+            <a:pPr algn="ctr"/>
+            <a:endParaRPr lang="en-IN">
+              <a:solidFill>
+                <a:schemeClr val="tx1"/>
+              </a:solidFill>
+            </a:endParaRPr>
+          </a:p>
+        </p:txBody>
+      </p:sp>
+      <p:sp>
+        <p:nvSpPr>
+          <p:cNvPr id="5" name="TextBox 4">
+            <a:extLst>
+              <a:ext uri="{FF2B5EF4-FFF2-40B4-BE49-F238E27FC236}">
+                <a16:creationId xmlns:a16="http://schemas.microsoft.com/office/drawing/2014/main" id="{294446B2-7266-9144-D8F8-39F1B88B3048}"/>
+              </a:ext>
+            </a:extLst>
+          </p:cNvPr>
+          <p:cNvSpPr txBox="1"/>
+          <p:nvPr/>
+        </p:nvSpPr>
+        <p:spPr>
+          <a:xfrm>
+            <a:off x="557277" y="170089"/>
+            <a:ext cx="5743446" cy="830997"/>
+          </a:xfrm>
+          <a:prstGeom prst="rect">
+            <a:avLst/>
+          </a:prstGeom>
+          <a:noFill/>
+        </p:spPr>
+        <p:txBody>
+          <a:bodyPr wrap="square" rtlCol="0">
+            <a:spAutoFit/>
+          </a:bodyPr>
+          <a:lstStyle/>
+          <a:p>
+            <a:pPr algn="ctr"/>
+            <a:r>
+              <a:rPr lang="de-DE" sz="4800" dirty="0">
+                <a:solidFill>
+                  <a:schemeClr val="accent4">
+                    <a:lumMod val="75000"/>
+                    <a:alpha val="33000"/>
+                  </a:schemeClr>
+                </a:solidFill>
+              </a:rPr>
+              <a:t>Quiet</a:t>
+            </a:r>
+            <a:r>
+              <a:rPr lang="de-DE" sz="4800" dirty="0">
+                <a:solidFill>
+                  <a:srgbClr val="FFD369">
+                    <a:alpha val="33000"/>
+                  </a:srgbClr>
+                </a:solidFill>
+              </a:rPr>
+              <a:t> </a:t>
+            </a:r>
+            <a:r>
+              <a:rPr lang="de-DE" sz="4800" dirty="0">
+                <a:solidFill>
+                  <a:srgbClr val="0C7B93">
+                    <a:alpha val="33000"/>
+                  </a:srgbClr>
+                </a:solidFill>
+              </a:rPr>
+              <a:t>Exceptional</a:t>
+            </a:r>
+            <a:endParaRPr lang="en-IN" sz="4800" dirty="0">
+              <a:solidFill>
+                <a:schemeClr val="accent2">
+                  <a:lumMod val="50000"/>
+                  <a:alpha val="33000"/>
+                </a:schemeClr>
+              </a:solidFill>
+            </a:endParaRPr>
+          </a:p>
+        </p:txBody>
+      </p:sp>
     </p:spTree>
     <p:extLst>
       <p:ext uri="{BB962C8B-B14F-4D97-AF65-F5344CB8AC3E}">
@@ -6448,7 +7943,7 @@
 </p:sld>
 </file>
 
-<file path=ppt/slides/slide7.xml><?xml version="1.0" encoding="utf-8"?>
+<file path=ppt/slides/slide8.xml><?xml version="1.0" encoding="utf-8"?>
 <p:sld xmlns:a="http://schemas.openxmlformats.org/drawingml/2006/main" xmlns:r="http://schemas.openxmlformats.org/officeDocument/2006/relationships" xmlns:p="http://schemas.openxmlformats.org/presentationml/2006/main">
   <p:cSld>
     <p:spTree>
@@ -6590,7 +8085,7 @@
         <p:spPr>
           <a:xfrm>
             <a:off x="715419" y="3398081"/>
-            <a:ext cx="4952125" cy="2985433"/>
+            <a:ext cx="3935693" cy="2985433"/>
           </a:xfrm>
           <a:prstGeom prst="rect">
             <a:avLst/>
@@ -6631,7 +8126,7 @@
                   </a:schemeClr>
                 </a:solidFill>
               </a:rPr>
-              <a:t>With Alarm Message</a:t>
+              <a:t>With SMS Alarm</a:t>
             </a:r>
             <a:endParaRPr lang="en-IN" sz="4400" dirty="0">
               <a:solidFill>
@@ -7140,76 +8635,81 @@
           </a:p>
         </p:txBody>
       </p:sp>
+      <p:sp>
+        <p:nvSpPr>
+          <p:cNvPr id="2" name="TextBox 1">
+            <a:extLst>
+              <a:ext uri="{FF2B5EF4-FFF2-40B4-BE49-F238E27FC236}">
+                <a16:creationId xmlns:a16="http://schemas.microsoft.com/office/drawing/2014/main" id="{D7D5A300-0B28-A278-ECA4-253A9A9EF334}"/>
+              </a:ext>
+            </a:extLst>
+          </p:cNvPr>
+          <p:cNvSpPr txBox="1"/>
+          <p:nvPr/>
+        </p:nvSpPr>
+        <p:spPr>
+          <a:xfrm>
+            <a:off x="557277" y="178683"/>
+            <a:ext cx="5743446" cy="830997"/>
+          </a:xfrm>
+          <a:prstGeom prst="rect">
+            <a:avLst/>
+          </a:prstGeom>
+          <a:noFill/>
+        </p:spPr>
+        <p:txBody>
+          <a:bodyPr wrap="square" rtlCol="0">
+            <a:spAutoFit/>
+          </a:bodyPr>
+          <a:lstStyle/>
+          <a:p>
+            <a:pPr algn="ctr"/>
+            <a:r>
+              <a:rPr lang="de-DE" sz="4800" dirty="0">
+                <a:solidFill>
+                  <a:schemeClr val="accent4">
+                    <a:lumMod val="75000"/>
+                    <a:alpha val="33000"/>
+                  </a:schemeClr>
+                </a:solidFill>
+              </a:rPr>
+              <a:t>Quiet</a:t>
+            </a:r>
+            <a:r>
+              <a:rPr lang="de-DE" sz="4800" dirty="0">
+                <a:solidFill>
+                  <a:srgbClr val="FFD369">
+                    <a:alpha val="33000"/>
+                  </a:srgbClr>
+                </a:solidFill>
+              </a:rPr>
+              <a:t> </a:t>
+            </a:r>
+            <a:r>
+              <a:rPr lang="de-DE" sz="4800" dirty="0">
+                <a:solidFill>
+                  <a:srgbClr val="0C7B93">
+                    <a:alpha val="33000"/>
+                  </a:srgbClr>
+                </a:solidFill>
+              </a:rPr>
+              <a:t>Exceptional</a:t>
+            </a:r>
+            <a:endParaRPr lang="en-IN" sz="4800" dirty="0">
+              <a:solidFill>
+                <a:schemeClr val="accent2">
+                  <a:lumMod val="50000"/>
+                  <a:alpha val="33000"/>
+                </a:schemeClr>
+              </a:solidFill>
+            </a:endParaRPr>
+          </a:p>
+        </p:txBody>
+      </p:sp>
     </p:spTree>
     <p:extLst>
       <p:ext uri="{BB962C8B-B14F-4D97-AF65-F5344CB8AC3E}">
         <p14:creationId xmlns:p14="http://schemas.microsoft.com/office/powerpoint/2010/main" val="1106134447"/>
-      </p:ext>
-    </p:extLst>
-  </p:cSld>
-  <p:clrMapOvr>
-    <a:masterClrMapping/>
-  </p:clrMapOvr>
-</p:sld>
-</file>
-
-<file path=ppt/slides/slide8.xml><?xml version="1.0" encoding="utf-8"?>
-<p:sld xmlns:a="http://schemas.openxmlformats.org/drawingml/2006/main" xmlns:r="http://schemas.openxmlformats.org/officeDocument/2006/relationships" xmlns:p="http://schemas.openxmlformats.org/presentationml/2006/main">
-  <p:cSld>
-    <p:spTree>
-      <p:nvGrpSpPr>
-        <p:cNvPr id="1" name=""/>
-        <p:cNvGrpSpPr/>
-        <p:nvPr/>
-      </p:nvGrpSpPr>
-      <p:grpSpPr>
-        <a:xfrm>
-          <a:off x="0" y="0"/>
-          <a:ext cx="0" cy="0"/>
-          <a:chOff x="0" y="0"/>
-          <a:chExt cx="0" cy="0"/>
-        </a:xfrm>
-      </p:grpSpPr>
-      <p:pic>
-        <p:nvPicPr>
-          <p:cNvPr id="3" name="Picture 2">
-            <a:extLst>
-              <a:ext uri="{FF2B5EF4-FFF2-40B4-BE49-F238E27FC236}">
-                <a16:creationId xmlns:a16="http://schemas.microsoft.com/office/drawing/2014/main" id="{FD120E9F-02FD-16FB-1F19-8A799143747A}"/>
-              </a:ext>
-            </a:extLst>
-          </p:cNvPr>
-          <p:cNvPicPr>
-            <a:picLocks noChangeAspect="1"/>
-          </p:cNvPicPr>
-          <p:nvPr/>
-        </p:nvPicPr>
-        <p:blipFill>
-          <a:blip r:embed="rId2">
-            <a:extLst>
-              <a:ext uri="{28A0092B-C50C-407E-A947-70E740481C1C}">
-                <a14:useLocalDpi xmlns:a14="http://schemas.microsoft.com/office/drawing/2010/main" val="0"/>
-              </a:ext>
-            </a:extLst>
-          </a:blip>
-          <a:stretch>
-            <a:fillRect/>
-          </a:stretch>
-        </p:blipFill>
-        <p:spPr>
-          <a:xfrm>
-            <a:off x="462915" y="4427577"/>
-            <a:ext cx="4389120" cy="2468880"/>
-          </a:xfrm>
-          <a:prstGeom prst="rect">
-            <a:avLst/>
-          </a:prstGeom>
-        </p:spPr>
-      </p:pic>
-    </p:spTree>
-    <p:extLst>
-      <p:ext uri="{BB962C8B-B14F-4D97-AF65-F5344CB8AC3E}">
-        <p14:creationId xmlns:p14="http://schemas.microsoft.com/office/powerpoint/2010/main" val="847829575"/>
       </p:ext>
     </p:extLst>
   </p:cSld>
@@ -7236,45 +8736,614 @@
           <a:chExt cx="0" cy="0"/>
         </a:xfrm>
       </p:grpSpPr>
-      <p:pic>
-        <p:nvPicPr>
-          <p:cNvPr id="7" name="Picture 6">
+      <p:sp>
+        <p:nvSpPr>
+          <p:cNvPr id="39" name="Rectangle: Top Corners Rounded 38">
             <a:extLst>
               <a:ext uri="{FF2B5EF4-FFF2-40B4-BE49-F238E27FC236}">
-                <a16:creationId xmlns:a16="http://schemas.microsoft.com/office/drawing/2014/main" id="{76CA6161-E05D-14EC-747C-79319681E604}"/>
+                <a16:creationId xmlns:a16="http://schemas.microsoft.com/office/drawing/2014/main" id="{22F07FBC-00E2-8927-662D-E738E21D9914}"/>
               </a:ext>
             </a:extLst>
           </p:cNvPr>
-          <p:cNvPicPr>
-            <a:picLocks/>
-          </p:cNvPicPr>
+          <p:cNvSpPr/>
           <p:nvPr/>
-        </p:nvPicPr>
-        <p:blipFill rotWithShape="1">
-          <a:blip r:embed="rId2">
+        </p:nvSpPr>
+        <p:spPr>
+          <a:xfrm>
+            <a:off x="673330" y="7658355"/>
+            <a:ext cx="5511338" cy="4533645"/>
+          </a:xfrm>
+          <a:prstGeom prst="round2SameRect">
+            <a:avLst>
+              <a:gd name="adj1" fmla="val 5166"/>
+              <a:gd name="adj2" fmla="val 0"/>
+            </a:avLst>
+          </a:prstGeom>
+          <a:solidFill>
+            <a:srgbClr val="DDE1ED"/>
+          </a:solidFill>
+          <a:ln w="127000"/>
+        </p:spPr>
+        <p:style>
+          <a:lnRef idx="2">
+            <a:schemeClr val="accent1">
+              <a:shade val="15000"/>
+            </a:schemeClr>
+          </a:lnRef>
+          <a:fillRef idx="1">
+            <a:schemeClr val="accent1"/>
+          </a:fillRef>
+          <a:effectRef idx="0">
+            <a:schemeClr val="accent1"/>
+          </a:effectRef>
+          <a:fontRef idx="minor">
+            <a:schemeClr val="lt1"/>
+          </a:fontRef>
+        </p:style>
+        <p:txBody>
+          <a:bodyPr rtlCol="0" anchor="ctr"/>
+          <a:lstStyle/>
+          <a:p>
+            <a:pPr algn="ctr"/>
+            <a:endParaRPr lang="en-IN"/>
+          </a:p>
+        </p:txBody>
+      </p:sp>
+      <p:sp>
+        <p:nvSpPr>
+          <p:cNvPr id="32" name="Rectangle: Top Corners Rounded 31">
             <a:extLst>
-              <a:ext uri="{28A0092B-C50C-407E-A947-70E740481C1C}">
-                <a14:useLocalDpi xmlns:a14="http://schemas.microsoft.com/office/drawing/2010/main" val="0"/>
+              <a:ext uri="{FF2B5EF4-FFF2-40B4-BE49-F238E27FC236}">
+                <a16:creationId xmlns:a16="http://schemas.microsoft.com/office/drawing/2014/main" id="{04AA2599-A007-70E7-E497-F17F579AC3B6}"/>
               </a:ext>
             </a:extLst>
-          </a:blip>
-          <a:srcRect l="23001" t="5779" r="25999" b="3111"/>
-          <a:stretch/>
-        </p:blipFill>
+          </p:cNvPr>
+          <p:cNvSpPr/>
+          <p:nvPr/>
+        </p:nvSpPr>
         <p:spPr>
           <a:xfrm>
-            <a:off x="1577340" y="4390073"/>
-            <a:ext cx="3442500" cy="3442500"/>
+            <a:off x="776378" y="7716145"/>
+            <a:ext cx="5358938" cy="471976"/>
+          </a:xfrm>
+          <a:prstGeom prst="round2SameRect">
+            <a:avLst>
+              <a:gd name="adj1" fmla="val 50000"/>
+              <a:gd name="adj2" fmla="val 0"/>
+            </a:avLst>
+          </a:prstGeom>
+          <a:solidFill>
+            <a:schemeClr val="tx1"/>
+          </a:solidFill>
+          <a:ln w="127000">
+            <a:solidFill>
+              <a:schemeClr val="tx1"/>
+            </a:solidFill>
+          </a:ln>
+        </p:spPr>
+        <p:style>
+          <a:lnRef idx="2">
+            <a:schemeClr val="accent1">
+              <a:shade val="15000"/>
+            </a:schemeClr>
+          </a:lnRef>
+          <a:fillRef idx="1">
+            <a:schemeClr val="accent1"/>
+          </a:fillRef>
+          <a:effectRef idx="0">
+            <a:schemeClr val="accent1"/>
+          </a:effectRef>
+          <a:fontRef idx="minor">
+            <a:schemeClr val="lt1"/>
+          </a:fontRef>
+        </p:style>
+        <p:txBody>
+          <a:bodyPr rtlCol="0" anchor="ctr"/>
+          <a:lstStyle/>
+          <a:p>
+            <a:pPr algn="ctr"/>
+            <a:endParaRPr lang="en-IN"/>
+          </a:p>
+        </p:txBody>
+      </p:sp>
+      <p:sp>
+        <p:nvSpPr>
+          <p:cNvPr id="3" name="TextBox 2">
+            <a:extLst>
+              <a:ext uri="{FF2B5EF4-FFF2-40B4-BE49-F238E27FC236}">
+                <a16:creationId xmlns:a16="http://schemas.microsoft.com/office/drawing/2014/main" id="{197DC2D2-644E-4E7D-E858-A90F1A77D396}"/>
+              </a:ext>
+            </a:extLst>
+          </p:cNvPr>
+          <p:cNvSpPr txBox="1"/>
+          <p:nvPr/>
+        </p:nvSpPr>
+        <p:spPr>
+          <a:xfrm>
+            <a:off x="103184" y="1374907"/>
+            <a:ext cx="6651629" cy="2862322"/>
           </a:xfrm>
           <a:prstGeom prst="rect">
             <a:avLst/>
           </a:prstGeom>
+          <a:noFill/>
         </p:spPr>
-      </p:pic>
+        <p:txBody>
+          <a:bodyPr wrap="none" rtlCol="0">
+            <a:spAutoFit/>
+          </a:bodyPr>
+          <a:lstStyle/>
+          <a:p>
+            <a:r>
+              <a:rPr lang="de-DE" sz="6000" dirty="0">
+                <a:solidFill>
+                  <a:srgbClr val="FFD369"/>
+                </a:solidFill>
+              </a:rPr>
+              <a:t>Alert if </a:t>
+            </a:r>
+          </a:p>
+          <a:p>
+            <a:r>
+              <a:rPr lang="de-DE" sz="6000" dirty="0">
+                <a:solidFill>
+                  <a:srgbClr val="0C7B93"/>
+                </a:solidFill>
+              </a:rPr>
+              <a:t>Notification contains</a:t>
+            </a:r>
+          </a:p>
+          <a:p>
+            <a:r>
+              <a:rPr lang="de-DE" sz="6000" dirty="0">
+                <a:solidFill>
+                  <a:srgbClr val="800000"/>
+                </a:solidFill>
+              </a:rPr>
+              <a:t>„Custom Text“</a:t>
+            </a:r>
+          </a:p>
+        </p:txBody>
+      </p:sp>
+      <p:sp>
+        <p:nvSpPr>
+          <p:cNvPr id="4" name="Speech Bubble: Rectangle with Corners Rounded 3">
+            <a:extLst>
+              <a:ext uri="{FF2B5EF4-FFF2-40B4-BE49-F238E27FC236}">
+                <a16:creationId xmlns:a16="http://schemas.microsoft.com/office/drawing/2014/main" id="{3434DDA7-4EDF-5AC9-6501-5ADA92C36A97}"/>
+              </a:ext>
+            </a:extLst>
+          </p:cNvPr>
+          <p:cNvSpPr/>
+          <p:nvPr/>
+        </p:nvSpPr>
+        <p:spPr>
+          <a:xfrm>
+            <a:off x="3019256" y="6203056"/>
+            <a:ext cx="945740" cy="746637"/>
+          </a:xfrm>
+          <a:prstGeom prst="wedgeRoundRectCallout">
+            <a:avLst>
+              <a:gd name="adj1" fmla="val -3874"/>
+              <a:gd name="adj2" fmla="val 90648"/>
+              <a:gd name="adj3" fmla="val 16667"/>
+            </a:avLst>
+          </a:prstGeom>
+          <a:noFill/>
+          <a:ln w="127000" cap="flat" cmpd="sng" algn="ctr">
+            <a:solidFill>
+              <a:srgbClr val="640000"/>
+            </a:solidFill>
+            <a:prstDash val="solid"/>
+            <a:round/>
+            <a:headEnd type="none" w="med" len="med"/>
+            <a:tailEnd type="none" w="med" len="med"/>
+          </a:ln>
+        </p:spPr>
+        <p:style>
+          <a:lnRef idx="0">
+            <a:scrgbClr r="0" g="0" b="0"/>
+          </a:lnRef>
+          <a:fillRef idx="0">
+            <a:scrgbClr r="0" g="0" b="0"/>
+          </a:fillRef>
+          <a:effectRef idx="0">
+            <a:scrgbClr r="0" g="0" b="0"/>
+          </a:effectRef>
+          <a:fontRef idx="minor">
+            <a:schemeClr val="dk1"/>
+          </a:fontRef>
+        </p:style>
+        <p:txBody>
+          <a:bodyPr rtlCol="0" anchor="ctr"/>
+          <a:lstStyle/>
+          <a:p>
+            <a:pPr algn="ctr"/>
+            <a:r>
+              <a:rPr lang="de-DE" sz="4500" dirty="0">
+                <a:solidFill>
+                  <a:srgbClr val="5E0B15"/>
+                </a:solidFill>
+              </a:rPr>
+              <a:t>!</a:t>
+            </a:r>
+            <a:endParaRPr lang="en-IN" sz="4500" dirty="0">
+              <a:solidFill>
+                <a:srgbClr val="5E0B15"/>
+              </a:solidFill>
+            </a:endParaRPr>
+          </a:p>
+        </p:txBody>
+      </p:sp>
+      <p:grpSp>
+        <p:nvGrpSpPr>
+          <p:cNvPr id="33" name="Group 32">
+            <a:extLst>
+              <a:ext uri="{FF2B5EF4-FFF2-40B4-BE49-F238E27FC236}">
+                <a16:creationId xmlns:a16="http://schemas.microsoft.com/office/drawing/2014/main" id="{89EA9E23-8B6D-423F-E883-B349C5400B38}"/>
+              </a:ext>
+            </a:extLst>
+          </p:cNvPr>
+          <p:cNvGrpSpPr/>
+          <p:nvPr/>
+        </p:nvGrpSpPr>
+        <p:grpSpPr>
+          <a:xfrm>
+            <a:off x="795251" y="8303829"/>
+            <a:ext cx="5276166" cy="1429788"/>
+            <a:chOff x="734292" y="7928527"/>
+            <a:chExt cx="5276166" cy="1429788"/>
+          </a:xfrm>
+        </p:grpSpPr>
+        <p:sp>
+          <p:nvSpPr>
+            <p:cNvPr id="28" name="Rectangle: Rounded Corners 27">
+              <a:extLst>
+                <a:ext uri="{FF2B5EF4-FFF2-40B4-BE49-F238E27FC236}">
+                  <a16:creationId xmlns:a16="http://schemas.microsoft.com/office/drawing/2014/main" id="{DC75807A-5FE9-609B-D997-7E7C24BA34D6}"/>
+                </a:ext>
+              </a:extLst>
+            </p:cNvPr>
+            <p:cNvSpPr/>
+            <p:nvPr/>
+          </p:nvSpPr>
+          <p:spPr>
+            <a:xfrm>
+              <a:off x="734292" y="7928527"/>
+              <a:ext cx="5276166" cy="1429788"/>
+            </a:xfrm>
+            <a:prstGeom prst="roundRect">
+              <a:avLst>
+                <a:gd name="adj" fmla="val 32946"/>
+              </a:avLst>
+            </a:prstGeom>
+            <a:solidFill>
+              <a:schemeClr val="tx2">
+                <a:lumMod val="75000"/>
+              </a:schemeClr>
+            </a:solidFill>
+            <a:ln>
+              <a:noFill/>
+            </a:ln>
+          </p:spPr>
+          <p:style>
+            <a:lnRef idx="2">
+              <a:schemeClr val="accent1">
+                <a:shade val="15000"/>
+              </a:schemeClr>
+            </a:lnRef>
+            <a:fillRef idx="1">
+              <a:schemeClr val="accent1"/>
+            </a:fillRef>
+            <a:effectRef idx="0">
+              <a:schemeClr val="accent1"/>
+            </a:effectRef>
+            <a:fontRef idx="minor">
+              <a:schemeClr val="lt1"/>
+            </a:fontRef>
+          </p:style>
+          <p:txBody>
+            <a:bodyPr rtlCol="0" anchor="ctr"/>
+            <a:lstStyle/>
+            <a:p>
+              <a:pPr algn="r"/>
+              <a:endParaRPr lang="de-DE" dirty="0"/>
+            </a:p>
+            <a:p>
+              <a:pPr algn="r"/>
+              <a:endParaRPr lang="de-DE" sz="3200" dirty="0"/>
+            </a:p>
+            <a:p>
+              <a:pPr algn="r"/>
+              <a:r>
+                <a:rPr lang="de-DE" sz="3200" dirty="0"/>
+                <a:t>Your Bank Account has ..</a:t>
+              </a:r>
+              <a:endParaRPr lang="en-IN" sz="3200" dirty="0"/>
+            </a:p>
+          </p:txBody>
+        </p:sp>
+        <p:sp>
+          <p:nvSpPr>
+            <p:cNvPr id="29" name="Speech Bubble: Rectangle with Corners Rounded 28">
+              <a:extLst>
+                <a:ext uri="{FF2B5EF4-FFF2-40B4-BE49-F238E27FC236}">
+                  <a16:creationId xmlns:a16="http://schemas.microsoft.com/office/drawing/2014/main" id="{C66E2BEB-17BB-8FC2-6EB0-1D0521E0293F}"/>
+                </a:ext>
+              </a:extLst>
+            </p:cNvPr>
+            <p:cNvSpPr/>
+            <p:nvPr/>
+          </p:nvSpPr>
+          <p:spPr>
+            <a:xfrm>
+              <a:off x="981933" y="8098528"/>
+              <a:ext cx="460916" cy="360069"/>
+            </a:xfrm>
+            <a:prstGeom prst="wedgeRoundRectCallout">
+              <a:avLst>
+                <a:gd name="adj1" fmla="val -3874"/>
+                <a:gd name="adj2" fmla="val 90648"/>
+                <a:gd name="adj3" fmla="val 16667"/>
+              </a:avLst>
+            </a:prstGeom>
+            <a:noFill/>
+            <a:ln w="47625" cap="flat" cmpd="sng" algn="ctr">
+              <a:solidFill>
+                <a:srgbClr val="FFFFFF"/>
+              </a:solidFill>
+              <a:prstDash val="solid"/>
+              <a:round/>
+              <a:headEnd type="none" w="med" len="med"/>
+              <a:tailEnd type="none" w="med" len="med"/>
+            </a:ln>
+          </p:spPr>
+          <p:style>
+            <a:lnRef idx="0">
+              <a:scrgbClr r="0" g="0" b="0"/>
+            </a:lnRef>
+            <a:fillRef idx="0">
+              <a:scrgbClr r="0" g="0" b="0"/>
+            </a:fillRef>
+            <a:effectRef idx="0">
+              <a:scrgbClr r="0" g="0" b="0"/>
+            </a:effectRef>
+            <a:fontRef idx="minor">
+              <a:schemeClr val="dk1"/>
+            </a:fontRef>
+          </p:style>
+          <p:txBody>
+            <a:bodyPr rtlCol="0" anchor="ctr"/>
+            <a:lstStyle/>
+            <a:p>
+              <a:pPr algn="ctr"/>
+              <a:endParaRPr lang="en-IN" sz="4500" dirty="0">
+                <a:solidFill>
+                  <a:srgbClr val="5E0B15"/>
+                </a:solidFill>
+              </a:endParaRPr>
+            </a:p>
+          </p:txBody>
+        </p:sp>
+        <p:sp>
+          <p:nvSpPr>
+            <p:cNvPr id="30" name="TextBox 29">
+              <a:extLst>
+                <a:ext uri="{FF2B5EF4-FFF2-40B4-BE49-F238E27FC236}">
+                  <a16:creationId xmlns:a16="http://schemas.microsoft.com/office/drawing/2014/main" id="{906C1AB9-1B85-F7C6-2D9C-231ACD769AF6}"/>
+                </a:ext>
+              </a:extLst>
+            </p:cNvPr>
+            <p:cNvSpPr txBox="1"/>
+            <p:nvPr/>
+          </p:nvSpPr>
+          <p:spPr>
+            <a:xfrm>
+              <a:off x="1557937" y="8093896"/>
+              <a:ext cx="1439497" cy="369332"/>
+            </a:xfrm>
+            <a:prstGeom prst="rect">
+              <a:avLst/>
+            </a:prstGeom>
+            <a:noFill/>
+          </p:spPr>
+          <p:txBody>
+            <a:bodyPr wrap="none" rtlCol="0">
+              <a:spAutoFit/>
+            </a:bodyPr>
+            <a:lstStyle/>
+            <a:p>
+              <a:r>
+                <a:rPr lang="de-DE" dirty="0">
+                  <a:solidFill>
+                    <a:srgbClr val="FFFFFF"/>
+                  </a:solidFill>
+                </a:rPr>
+                <a:t>Message App</a:t>
+              </a:r>
+              <a:endParaRPr lang="en-IN" dirty="0">
+                <a:solidFill>
+                  <a:srgbClr val="FFFFFF"/>
+                </a:solidFill>
+              </a:endParaRPr>
+            </a:p>
+          </p:txBody>
+        </p:sp>
+      </p:grpSp>
+      <p:sp>
+        <p:nvSpPr>
+          <p:cNvPr id="41" name="Oval 40">
+            <a:extLst>
+              <a:ext uri="{FF2B5EF4-FFF2-40B4-BE49-F238E27FC236}">
+                <a16:creationId xmlns:a16="http://schemas.microsoft.com/office/drawing/2014/main" id="{E61DC83A-A9A6-DBC0-9CA6-3E9F2C7B2ADF}"/>
+              </a:ext>
+            </a:extLst>
+          </p:cNvPr>
+          <p:cNvSpPr/>
+          <p:nvPr/>
+        </p:nvSpPr>
+        <p:spPr>
+          <a:xfrm>
+            <a:off x="3311931" y="7735907"/>
+            <a:ext cx="277781" cy="323492"/>
+          </a:xfrm>
+          <a:prstGeom prst="ellipse">
+            <a:avLst/>
+          </a:prstGeom>
+          <a:solidFill>
+            <a:schemeClr val="tx1">
+              <a:lumMod val="75000"/>
+              <a:lumOff val="25000"/>
+            </a:schemeClr>
+          </a:solidFill>
+          <a:ln>
+            <a:noFill/>
+          </a:ln>
+        </p:spPr>
+        <p:style>
+          <a:lnRef idx="2">
+            <a:schemeClr val="accent1">
+              <a:shade val="15000"/>
+            </a:schemeClr>
+          </a:lnRef>
+          <a:fillRef idx="1">
+            <a:schemeClr val="accent1"/>
+          </a:fillRef>
+          <a:effectRef idx="0">
+            <a:schemeClr val="accent1"/>
+          </a:effectRef>
+          <a:fontRef idx="minor">
+            <a:schemeClr val="lt1"/>
+          </a:fontRef>
+        </p:style>
+        <p:txBody>
+          <a:bodyPr rtlCol="0" anchor="ctr"/>
+          <a:lstStyle/>
+          <a:p>
+            <a:pPr algn="ctr"/>
+            <a:endParaRPr lang="en-IN"/>
+          </a:p>
+        </p:txBody>
+      </p:sp>
+      <p:sp>
+        <p:nvSpPr>
+          <p:cNvPr id="2" name="TextBox 1">
+            <a:extLst>
+              <a:ext uri="{FF2B5EF4-FFF2-40B4-BE49-F238E27FC236}">
+                <a16:creationId xmlns:a16="http://schemas.microsoft.com/office/drawing/2014/main" id="{D7D5A300-0B28-A278-ECA4-253A9A9EF334}"/>
+              </a:ext>
+            </a:extLst>
+          </p:cNvPr>
+          <p:cNvSpPr txBox="1"/>
+          <p:nvPr/>
+        </p:nvSpPr>
+        <p:spPr>
+          <a:xfrm>
+            <a:off x="557277" y="178683"/>
+            <a:ext cx="5743446" cy="830997"/>
+          </a:xfrm>
+          <a:prstGeom prst="rect">
+            <a:avLst/>
+          </a:prstGeom>
+          <a:noFill/>
+        </p:spPr>
+        <p:txBody>
+          <a:bodyPr wrap="square" rtlCol="0">
+            <a:spAutoFit/>
+          </a:bodyPr>
+          <a:lstStyle/>
+          <a:p>
+            <a:pPr algn="ctr"/>
+            <a:r>
+              <a:rPr lang="de-DE" sz="4800" dirty="0">
+                <a:solidFill>
+                  <a:schemeClr val="accent4">
+                    <a:lumMod val="75000"/>
+                    <a:alpha val="33000"/>
+                  </a:schemeClr>
+                </a:solidFill>
+              </a:rPr>
+              <a:t>Quiet</a:t>
+            </a:r>
+            <a:r>
+              <a:rPr lang="de-DE" sz="4800" dirty="0">
+                <a:solidFill>
+                  <a:srgbClr val="FFD369">
+                    <a:alpha val="33000"/>
+                  </a:srgbClr>
+                </a:solidFill>
+              </a:rPr>
+              <a:t> </a:t>
+            </a:r>
+            <a:r>
+              <a:rPr lang="de-DE" sz="4800" dirty="0">
+                <a:solidFill>
+                  <a:srgbClr val="0C7B93">
+                    <a:alpha val="33000"/>
+                  </a:srgbClr>
+                </a:solidFill>
+              </a:rPr>
+              <a:t>Exceptional</a:t>
+            </a:r>
+            <a:endParaRPr lang="en-IN" sz="4800" dirty="0">
+              <a:solidFill>
+                <a:schemeClr val="accent2">
+                  <a:lumMod val="50000"/>
+                  <a:alpha val="33000"/>
+                </a:schemeClr>
+              </a:solidFill>
+            </a:endParaRPr>
+          </a:p>
+        </p:txBody>
+      </p:sp>
+      <p:sp>
+        <p:nvSpPr>
+          <p:cNvPr id="10" name="TextBox 9">
+            <a:extLst>
+              <a:ext uri="{FF2B5EF4-FFF2-40B4-BE49-F238E27FC236}">
+                <a16:creationId xmlns:a16="http://schemas.microsoft.com/office/drawing/2014/main" id="{52CC406C-52AD-4BAB-9906-C4880DA2D440}"/>
+              </a:ext>
+            </a:extLst>
+          </p:cNvPr>
+          <p:cNvSpPr txBox="1"/>
+          <p:nvPr/>
+        </p:nvSpPr>
+        <p:spPr>
+          <a:xfrm>
+            <a:off x="184849" y="5136947"/>
+            <a:ext cx="3896451" cy="646331"/>
+          </a:xfrm>
+          <a:prstGeom prst="rect">
+            <a:avLst/>
+          </a:prstGeom>
+          <a:noFill/>
+        </p:spPr>
+        <p:txBody>
+          <a:bodyPr wrap="none" rtlCol="0">
+            <a:spAutoFit/>
+          </a:bodyPr>
+          <a:lstStyle/>
+          <a:p>
+            <a:r>
+              <a:rPr lang="de-DE" sz="3600" dirty="0">
+                <a:solidFill>
+                  <a:srgbClr val="0C7B93"/>
+                </a:solidFill>
+              </a:rPr>
+              <a:t>For example „Bank“</a:t>
+            </a:r>
+            <a:endParaRPr lang="de-DE" sz="3600" dirty="0">
+              <a:solidFill>
+                <a:srgbClr val="FFD369"/>
+              </a:solidFill>
+            </a:endParaRPr>
+          </a:p>
+        </p:txBody>
+      </p:sp>
     </p:spTree>
     <p:extLst>
       <p:ext uri="{BB962C8B-B14F-4D97-AF65-F5344CB8AC3E}">
-        <p14:creationId xmlns:p14="http://schemas.microsoft.com/office/powerpoint/2010/main" val="3956892257"/>
+        <p14:creationId xmlns:p14="http://schemas.microsoft.com/office/powerpoint/2010/main" val="3559307144"/>
       </p:ext>
     </p:extLst>
   </p:cSld>
